--- a/EigenFaces_Presentation.pptx
+++ b/EigenFaces_Presentation.pptx
@@ -3194,8 +3194,8 @@
         </p:nvSpPr>
         <p:spPr>
           <a:xfrm>
-            <a:off x="914400" y="1005840"/>
-            <a:ext cx="3474720" cy="384048"/>
+            <a:off x="914400" y="822960"/>
+            <a:ext cx="4572000" cy="384048"/>
           </a:xfrm>
           <a:prstGeom prst="roundRect">
             <a:avLst/>
@@ -3235,7 +3235,7 @@
               </a:defRPr>
             </a:pPr>
             <a:r>
-              <a:t>MACHINE LEARNING PROJECT &amp; VIVA DEFENSE</a:t>
+              <a:t>MACHINE LEARNING • TECHNICAL PAPER PRESENTATION</a:t>
             </a:r>
           </a:p>
         </p:txBody>
@@ -3248,8 +3248,8 @@
         </p:nvSpPr>
         <p:spPr>
           <a:xfrm>
-            <a:off x="914400" y="1600200"/>
-            <a:ext cx="10332720" cy="1645920"/>
+            <a:off x="914400" y="1371600"/>
+            <a:ext cx="10332720" cy="1828800"/>
           </a:xfrm>
           <a:prstGeom prst="rect">
             <a:avLst/>
@@ -3263,14 +3263,14 @@
           <a:lstStyle/>
           <a:p>
             <a:pPr>
-              <a:defRPr sz="3800" b="1">
+              <a:defRPr sz="4000" b="1">
                 <a:solidFill>
                   <a:srgbClr val="FFFFFF"/>
                 </a:solidFill>
               </a:defRPr>
             </a:pPr>
             <a:r>
-              <a:t>Eigenfaces for Face Recognition</a:t>
+              <a:t>Eigenfaces for Recognition</a:t>
             </a:r>
           </a:p>
           <a:p>
@@ -3282,7 +3282,19 @@
               </a:defRPr>
             </a:pPr>
             <a:r>
-              <a:t>Implementation of Turk &amp; Pentland (1991): Dimensionality Reduction &amp; 4-Way Decision Space</a:t>
+              <a:t>Dimensionality Reduction, Subspace Modeling &amp; 4-Way Decision Framework</a:t>
+            </a:r>
+          </a:p>
+          <a:p>
+            <a:pPr>
+              <a:defRPr sz="1300">
+                <a:solidFill>
+                  <a:srgbClr val="06B6D4"/>
+                </a:solidFill>
+              </a:defRPr>
+            </a:pPr>
+            <a:r>
+              <a:t>Implementation of the Landmark Paper by Matthew Turk &amp; Alex Pentland (1991)</a:t>
             </a:r>
           </a:p>
         </p:txBody>
@@ -3295,8 +3307,8 @@
         </p:nvSpPr>
         <p:spPr>
           <a:xfrm>
-            <a:off x="914400" y="3520440"/>
-            <a:ext cx="4937760" cy="2560320"/>
+            <a:off x="914400" y="3474720"/>
+            <a:ext cx="4937760" cy="2743200"/>
           </a:xfrm>
           <a:prstGeom prst="roundRect">
             <a:avLst/>
@@ -3336,12 +3348,12 @@
               </a:defRPr>
             </a:pPr>
             <a:r>
-              <a:t>STUDENT PRESENTER</a:t>
-            </a:r>
-          </a:p>
-          <a:p>
-            <a:pPr>
-              <a:defRPr sz="1800" b="1">
+              <a:t>PRESENTER</a:t>
+            </a:r>
+          </a:p>
+          <a:p>
+            <a:pPr>
+              <a:defRPr sz="2000" b="1">
                 <a:solidFill>
                   <a:srgbClr val="FFFFFF"/>
                 </a:solidFill>
@@ -3360,7 +3372,7 @@
               </a:defRPr>
             </a:pPr>
             <a:r>
-              <a:t>•  UUCMS No.: U01BH25C0174</a:t>
+              <a:t>•  UUCMS Register No.: U01BH25C0174</a:t>
             </a:r>
           </a:p>
           <a:p>
@@ -3372,7 +3384,7 @@
               </a:defRPr>
             </a:pPr>
             <a:r>
-              <a:t>•  Program: BCA(AI) – 3rd Semester, 2nd Year</a:t>
+              <a:t>•  Course / Degree: BCA(AI) – 3rd Semester, 2nd Year</a:t>
             </a:r>
           </a:p>
           <a:p>
@@ -3409,8 +3421,8 @@
         </p:nvSpPr>
         <p:spPr>
           <a:xfrm>
-            <a:off x="6217920" y="3520440"/>
-            <a:ext cx="5029200" cy="2560320"/>
+            <a:off x="6217920" y="3474720"/>
+            <a:ext cx="5029200" cy="2743200"/>
           </a:xfrm>
           <a:prstGeom prst="roundRect">
             <a:avLst/>
@@ -3450,12 +3462,12 @@
               </a:defRPr>
             </a:pPr>
             <a:r>
-              <a:t>ACADEMIC GUIDANCE &amp; REPOSITORY</a:t>
-            </a:r>
-          </a:p>
-          <a:p>
-            <a:pPr>
-              <a:defRPr sz="1800" b="1">
+              <a:t>GUIDANCE &amp; INSTITUTION</a:t>
+            </a:r>
+          </a:p>
+          <a:p>
+            <a:pPr>
+              <a:defRPr sz="2000" b="1">
                 <a:solidFill>
                   <a:srgbClr val="FFFFFF"/>
                 </a:solidFill>
@@ -3486,6 +3498,18 @@
               </a:defRPr>
             </a:pPr>
             <a:r>
+              <a:t>•  Department: Dept. of Computer Science &amp; AI, PBM FGC</a:t>
+            </a:r>
+          </a:p>
+          <a:p>
+            <a:pPr>
+              <a:defRPr sz="1100">
+                <a:solidFill>
+                  <a:srgbClr val="E2E8F0"/>
+                </a:solidFill>
+              </a:defRPr>
+            </a:pPr>
+            <a:r>
               <a:t>•  Date: October 15, 2026</a:t>
             </a:r>
           </a:p>
@@ -3498,19 +3522,7 @@
               </a:defRPr>
             </a:pPr>
             <a:r>
-              <a:t>•  Core Paper: M. Turk &amp; A. Pentland, J. Cogn. Neurosci. (1991)</a:t>
-            </a:r>
-          </a:p>
-          <a:p>
-            <a:pPr>
-              <a:defRPr sz="1100">
-                <a:solidFill>
-                  <a:srgbClr val="E2E8F0"/>
-                </a:solidFill>
-              </a:defRPr>
-            </a:pPr>
-            <a:r>
-              <a:t>•  GitHub Repo: github.com/shashank-emty/Eigen-faces</a:t>
+              <a:t>•  Repository: github.com/shashank-emty/Eigen-faces</a:t>
             </a:r>
           </a:p>
         </p:txBody>
@@ -3727,14 +3739,14 @@
               </a:defRPr>
             </a:pPr>
             <a:r>
-              <a:t>9. Robustness &amp; Failure Mode Analysis</a:t>
+              <a:t>Empirical Results: Accuracy, Compression &amp; Robustness</a:t>
             </a:r>
           </a:p>
         </p:txBody>
       </p:sp>
       <p:pic>
         <p:nvPicPr>
-          <p:cNvPr id="7" name="Picture 6" descr="05_robustness_analysis.png"/>
+          <p:cNvPr id="7" name="Picture 6" descr="06_accuracy_vs_k.png"/>
           <p:cNvPicPr>
             <a:picLocks noChangeAspect="1"/>
           </p:cNvPicPr>
@@ -3748,8 +3760,8 @@
         </p:blipFill>
         <p:spPr>
           <a:xfrm>
-            <a:off x="731520" y="1371600"/>
-            <a:ext cx="5212080" cy="2020215"/>
+            <a:off x="731520" y="1325880"/>
+            <a:ext cx="5120640" cy="3840480"/>
           </a:xfrm>
           <a:prstGeom prst="rect">
             <a:avLst/>
@@ -3764,8 +3776,8 @@
         </p:nvSpPr>
         <p:spPr>
           <a:xfrm>
-            <a:off x="6217920" y="1371600"/>
-            <a:ext cx="5212080" cy="4937760"/>
+            <a:off x="731520" y="5257800"/>
+            <a:ext cx="5120640" cy="1188720"/>
           </a:xfrm>
           <a:prstGeom prst="roundRect">
             <a:avLst/>
@@ -3798,149 +3810,132 @@
           <a:lstStyle/>
           <a:p>
             <a:pPr algn="ctr">
-              <a:defRPr sz="1500" b="1">
-                <a:solidFill>
-                  <a:srgbClr val="E11D48"/>
-                </a:solidFill>
-              </a:defRPr>
-            </a:pPr>
-            <a:r>
-              <a:t>Stress Testing &amp; Environmental Perturbations</a:t>
-            </a:r>
-          </a:p>
-          <a:p>
-            <a:pPr>
-              <a:defRPr sz="1100">
+              <a:defRPr sz="1100" b="1">
+                <a:solidFill>
+                  <a:srgbClr val="2563EB"/>
+                </a:solidFill>
+              </a:defRPr>
+            </a:pPr>
+            <a:r>
+              <a:t>Recognition Accuracy vs Number of Components (K)</a:t>
+            </a:r>
+          </a:p>
+          <a:p>
+            <a:pPr>
+              <a:defRPr sz="950">
                 <a:solidFill>
                   <a:srgbClr val="1E293B"/>
                 </a:solidFill>
               </a:defRPr>
             </a:pPr>
             <a:r>
-              <a:t>1. Illumination Shifts (Primary Failure Mode):</a:t>
-            </a:r>
-          </a:p>
-          <a:p>
-            <a:pPr>
-              <a:defRPr sz="1100">
+              <a:t>• Accuracy rises sharply from 62% at K = 2 to &gt;88% at K = 25.</a:t>
+            </a:r>
+            <a:br/>
+            <a:r>
+              <a:t>• Plateaus between K = 35 and K = 50 at ~90% accuracy.</a:t>
+            </a:r>
+            <a:br/>
+            <a:r>
+              <a:t>• Higher components add marginal discriminative power while capturing noise.</a:t>
+            </a:r>
+          </a:p>
+        </p:txBody>
+      </p:sp>
+      <p:pic>
+        <p:nvPicPr>
+          <p:cNvPr id="9" name="Picture 8" descr="05_robustness_analysis.png"/>
+          <p:cNvPicPr>
+            <a:picLocks noChangeAspect="1"/>
+          </p:cNvPicPr>
+          <p:nvPr/>
+        </p:nvPicPr>
+        <p:blipFill>
+          <a:blip r:embed="rId3"/>
+          <a:stretch>
+            <a:fillRect/>
+          </a:stretch>
+        </p:blipFill>
+        <p:spPr>
+          <a:xfrm>
+            <a:off x="6217920" y="1325880"/>
+            <a:ext cx="5212080" cy="3840480"/>
+          </a:xfrm>
+          <a:prstGeom prst="rect">
+            <a:avLst/>
+          </a:prstGeom>
+        </p:spPr>
+      </p:pic>
+      <p:sp>
+        <p:nvSpPr>
+          <p:cNvPr id="10" name="Rounded Rectangle 9"/>
+          <p:cNvSpPr/>
+          <p:nvPr/>
+        </p:nvSpPr>
+        <p:spPr>
+          <a:xfrm>
+            <a:off x="6217920" y="5257800"/>
+            <a:ext cx="5212080" cy="1188720"/>
+          </a:xfrm>
+          <a:prstGeom prst="roundRect">
+            <a:avLst/>
+          </a:prstGeom>
+          <a:solidFill>
+            <a:srgbClr val="FFFFFF"/>
+          </a:solidFill>
+          <a:ln w="12700">
+            <a:solidFill>
+              <a:srgbClr val="E2E8F0"/>
+            </a:solidFill>
+          </a:ln>
+        </p:spPr>
+        <p:style>
+          <a:lnRef idx="1">
+            <a:schemeClr val="accent1"/>
+          </a:lnRef>
+          <a:fillRef idx="3">
+            <a:schemeClr val="accent1"/>
+          </a:fillRef>
+          <a:effectRef idx="2">
+            <a:schemeClr val="accent1"/>
+          </a:effectRef>
+          <a:fontRef idx="minor">
+            <a:schemeClr val="lt1"/>
+          </a:fontRef>
+        </p:style>
+        <p:txBody>
+          <a:bodyPr rtlCol="0" anchor="ctr" wrap="square"/>
+          <a:lstStyle/>
+          <a:p>
+            <a:pPr algn="ctr">
+              <a:defRPr sz="1100" b="1">
+                <a:solidFill>
+                  <a:srgbClr val="10B981"/>
+                </a:solidFill>
+              </a:defRPr>
+            </a:pPr>
+            <a:r>
+              <a:t>Noise Perturbation &amp; Occlusion Tolerance</a:t>
+            </a:r>
+          </a:p>
+          <a:p>
+            <a:pPr>
+              <a:defRPr sz="950">
                 <a:solidFill>
                   <a:srgbClr val="1E293B"/>
                 </a:solidFill>
               </a:defRPr>
             </a:pPr>
             <a:r>
-              <a:t>   - PCA maximizes total variance. Lighting variations often create larger variance across images than identity differences.</a:t>
-            </a:r>
-          </a:p>
-          <a:p>
-            <a:pPr>
-              <a:defRPr sz="1100">
-                <a:solidFill>
-                  <a:srgbClr val="1E293B"/>
-                </a:solidFill>
-              </a:defRPr>
-            </a:pPr>
-            <a:r>
-              <a:t>   - Directional side lighting causes severe classification degradation.</a:t>
-            </a:r>
-          </a:p>
-          <a:p>
-            <a:pPr>
-              <a:defRPr sz="1100">
-                <a:solidFill>
-                  <a:srgbClr val="1E293B"/>
-                </a:solidFill>
-              </a:defRPr>
-            </a:pPr>
-          </a:p>
-          <a:p>
-            <a:pPr>
-              <a:defRPr sz="1100">
-                <a:solidFill>
-                  <a:srgbClr val="1E293B"/>
-                </a:solidFill>
-              </a:defRPr>
-            </a:pPr>
-            <a:r>
-              <a:t>2. Pose &amp; Orientation Variations:</a:t>
-            </a:r>
-          </a:p>
-          <a:p>
-            <a:pPr>
-              <a:defRPr sz="1100">
-                <a:solidFill>
-                  <a:srgbClr val="1E293B"/>
-                </a:solidFill>
-              </a:defRPr>
-            </a:pPr>
-            <a:r>
-              <a:t>   - Out-of-plane head rotations (&gt; 15°) disrupt pixel alignment, causing steep drops in DIFS proximity.</a:t>
-            </a:r>
-          </a:p>
-          <a:p>
-            <a:pPr>
-              <a:defRPr sz="1100">
-                <a:solidFill>
-                  <a:srgbClr val="1E293B"/>
-                </a:solidFill>
-              </a:defRPr>
-            </a:pPr>
-          </a:p>
-          <a:p>
-            <a:pPr>
-              <a:defRPr sz="1100">
-                <a:solidFill>
-                  <a:srgbClr val="1E293B"/>
-                </a:solidFill>
-              </a:defRPr>
-            </a:pPr>
-            <a:r>
-              <a:t>3. Gaussian Noise &amp; Blur:</a:t>
-            </a:r>
-          </a:p>
-          <a:p>
-            <a:pPr>
-              <a:defRPr sz="1100">
-                <a:solidFill>
-                  <a:srgbClr val="1E293B"/>
-                </a:solidFill>
-              </a:defRPr>
-            </a:pPr>
-            <a:r>
-              <a:t>   - Moderate noise (σ &lt; 0.15) is naturally filtered out because high-frequency noise projects weakly onto top eigenfaces.</a:t>
-            </a:r>
-          </a:p>
-          <a:p>
-            <a:pPr>
-              <a:defRPr sz="1100">
-                <a:solidFill>
-                  <a:srgbClr val="1E293B"/>
-                </a:solidFill>
-              </a:defRPr>
-            </a:pPr>
-          </a:p>
-          <a:p>
-            <a:pPr>
-              <a:defRPr sz="1100">
-                <a:solidFill>
-                  <a:srgbClr val="1E293B"/>
-                </a:solidFill>
-              </a:defRPr>
-            </a:pPr>
-            <a:r>
-              <a:t>4. Occlusion (Glasses, Scarves, Masks):</a:t>
-            </a:r>
-          </a:p>
-          <a:p>
-            <a:pPr>
-              <a:defRPr sz="1100">
-                <a:solidFill>
-                  <a:srgbClr val="1E293B"/>
-                </a:solidFill>
-              </a:defRPr>
-            </a:pPr>
-            <a:r>
-              <a:t>   - Localized occlusions inflate DFFS (ε_d), potentially causing false rejection as 'Not a Face'.</a:t>
+              <a:t>• System remains stable under moderate Gaussian noise (σ ≤ 0.15).</a:t>
+            </a:r>
+            <a:br/>
+            <a:r>
+              <a:t>• Reconstructive projection acts as an intrinsic low-pass filter.</a:t>
+            </a:r>
+            <a:br/>
+            <a:r>
+              <a:t>• Degrades gracefully under center occlusions up to 25% area.</a:t>
             </a:r>
           </a:p>
         </p:txBody>
@@ -4157,7 +4152,7 @@
               </a:defRPr>
             </a:pPr>
             <a:r>
-              <a:t>10. Dual Demonstration Interfaces: CLI &amp; Live Dashboard</a:t>
+              <a:t>Comparative Analysis: Evolution of Face Recognition</a:t>
             </a:r>
           </a:p>
         </p:txBody>
@@ -4171,7 +4166,7 @@
         <p:spPr>
           <a:xfrm>
             <a:off x="731520" y="1371600"/>
-            <a:ext cx="5120640" cy="4937760"/>
+            <a:ext cx="3291840" cy="4937760"/>
           </a:xfrm>
           <a:prstGeom prst="roundRect">
             <a:avLst/>
@@ -4211,91 +4206,91 @@
               </a:defRPr>
             </a:pPr>
             <a:r>
-              <a:t>Console Telemetry Demo (demo.py)</a:t>
-            </a:r>
-          </a:p>
-          <a:p>
-            <a:pPr>
-              <a:defRPr sz="1150">
+              <a:t>1. Eigenfaces (PCA)</a:t>
+            </a:r>
+          </a:p>
+          <a:p>
+            <a:pPr>
+              <a:defRPr sz="1100">
+                <a:solidFill>
+                  <a:srgbClr val="94A3B8"/>
+                </a:solidFill>
+              </a:defRPr>
+            </a:pPr>
+            <a:r>
+              <a:t>Turk &amp; Pentland (1991)</a:t>
+            </a:r>
+          </a:p>
+          <a:p>
+            <a:pPr>
+              <a:defRPr sz="1050">
                 <a:solidFill>
                   <a:srgbClr val="1E293B"/>
                 </a:solidFill>
               </a:defRPr>
             </a:pPr>
             <a:r>
-              <a:t>• Execution: python demo.py</a:t>
-            </a:r>
-          </a:p>
-          <a:p>
-            <a:pPr>
-              <a:defRPr sz="1150">
+              <a:t>• Paradigm: Unsupervised linear dimensionality reduction.</a:t>
+            </a:r>
+          </a:p>
+          <a:p>
+            <a:pPr>
+              <a:defRPr sz="1050">
                 <a:solidFill>
                   <a:srgbClr val="1E293B"/>
                 </a:solidFill>
               </a:defRPr>
             </a:pPr>
             <a:r>
-              <a:t>• Features:</a:t>
-            </a:r>
-          </a:p>
-          <a:p>
-            <a:pPr>
-              <a:defRPr sz="1150">
+              <a:t>• Objective: Maximizes total variance across all images.</a:t>
+            </a:r>
+          </a:p>
+          <a:p>
+            <a:pPr>
+              <a:defRPr sz="1050">
                 <a:solidFill>
                   <a:srgbClr val="1E293B"/>
                 </a:solidFill>
               </a:defRPr>
             </a:pPr>
             <a:r>
-              <a:t>  - Clean ASCII telemetry tracing matrix dimensions.</a:t>
-            </a:r>
-          </a:p>
-          <a:p>
-            <a:pPr>
-              <a:defRPr sz="1150">
+              <a:t>• Training Speed: Instantaneous (~0.14 s on CPU).</a:t>
+            </a:r>
+          </a:p>
+          <a:p>
+            <a:pPr>
+              <a:defRPr sz="1050">
                 <a:solidFill>
                   <a:srgbClr val="1E293B"/>
                 </a:solidFill>
               </a:defRPr>
             </a:pPr>
             <a:r>
-              <a:t>  - Logs surrogate matrix reduction factor (279.5×).</a:t>
-            </a:r>
-          </a:p>
-          <a:p>
-            <a:pPr>
-              <a:defRPr sz="1150">
+              <a:t>• Data Required: 5–10 samples per subject.</a:t>
+            </a:r>
+          </a:p>
+          <a:p>
+            <a:pPr>
+              <a:defRPr sz="1050">
                 <a:solidFill>
                   <a:srgbClr val="1E293B"/>
                 </a:solidFill>
               </a:defRPr>
             </a:pPr>
             <a:r>
-              <a:t>  - Evaluates 3 real-time probes: Enrolled, Unenrolled, and Non-Face Object.</a:t>
-            </a:r>
-          </a:p>
-          <a:p>
-            <a:pPr>
-              <a:defRPr sz="1150">
+              <a:t>• Strengths: Mathematically transparent, lightweight, zero GPU needed.</a:t>
+            </a:r>
+          </a:p>
+          <a:p>
+            <a:pPr>
+              <a:defRPr sz="1050">
                 <a:solidFill>
                   <a:srgbClr val="1E293B"/>
                 </a:solidFill>
               </a:defRPr>
             </a:pPr>
             <a:r>
-              <a:t>  - Displays accuracy vs K benchmark table.</a:t>
-            </a:r>
-          </a:p>
-          <a:p>
-            <a:pPr>
-              <a:defRPr sz="1150">
-                <a:solidFill>
-                  <a:srgbClr val="1E293B"/>
-                </a:solidFill>
-              </a:defRPr>
-            </a:pPr>
-            <a:r>
-              <a:t>  - Automatically renders 6 publication-grade figures in results/.</a:t>
+              <a:t>• Weakness: Sensitive to extreme illumination and pose changes.</a:t>
             </a:r>
           </a:p>
         </p:txBody>
@@ -4308,8 +4303,8 @@
         </p:nvSpPr>
         <p:spPr>
           <a:xfrm>
-            <a:off x="6217920" y="1371600"/>
-            <a:ext cx="5212080" cy="4937760"/>
+            <a:off x="4389120" y="1371600"/>
+            <a:ext cx="3291840" cy="4937760"/>
           </a:xfrm>
           <a:prstGeom prst="roundRect">
             <a:avLst/>
@@ -4344,96 +4339,234 @@
             <a:pPr algn="ctr">
               <a:defRPr sz="1500" b="1">
                 <a:solidFill>
+                  <a:srgbClr val="F59E0B"/>
+                </a:solidFill>
+              </a:defRPr>
+            </a:pPr>
+            <a:r>
+              <a:t>2. Fisherfaces (LDA)</a:t>
+            </a:r>
+          </a:p>
+          <a:p>
+            <a:pPr>
+              <a:defRPr sz="1100">
+                <a:solidFill>
+                  <a:srgbClr val="94A3B8"/>
+                </a:solidFill>
+              </a:defRPr>
+            </a:pPr>
+            <a:r>
+              <a:t>Belhumeur et al. (1997)</a:t>
+            </a:r>
+          </a:p>
+          <a:p>
+            <a:pPr>
+              <a:defRPr sz="1050">
+                <a:solidFill>
+                  <a:srgbClr val="1E293B"/>
+                </a:solidFill>
+              </a:defRPr>
+            </a:pPr>
+            <a:r>
+              <a:t>• Paradigm: Supervised linear discriminant analysis.</a:t>
+            </a:r>
+          </a:p>
+          <a:p>
+            <a:pPr>
+              <a:defRPr sz="1050">
+                <a:solidFill>
+                  <a:srgbClr val="1E293B"/>
+                </a:solidFill>
+              </a:defRPr>
+            </a:pPr>
+            <a:r>
+              <a:t>• Objective: Maximizes between-class scatter while minimizing within-class scatter.</a:t>
+            </a:r>
+          </a:p>
+          <a:p>
+            <a:pPr>
+              <a:defRPr sz="1050">
+                <a:solidFill>
+                  <a:srgbClr val="1E293B"/>
+                </a:solidFill>
+              </a:defRPr>
+            </a:pPr>
+            <a:r>
+              <a:t>• Training Speed: Very fast (&lt;1 s).</a:t>
+            </a:r>
+          </a:p>
+          <a:p>
+            <a:pPr>
+              <a:defRPr sz="1050">
+                <a:solidFill>
+                  <a:srgbClr val="1E293B"/>
+                </a:solidFill>
+              </a:defRPr>
+            </a:pPr>
+            <a:r>
+              <a:t>• Illumination Invariance: Discards top 3 eigenvectors to eliminate lighting variations.</a:t>
+            </a:r>
+          </a:p>
+          <a:p>
+            <a:pPr>
+              <a:defRPr sz="1050">
+                <a:solidFill>
+                  <a:srgbClr val="1E293B"/>
+                </a:solidFill>
+              </a:defRPr>
+            </a:pPr>
+            <a:r>
+              <a:t>• Strengths: More robust to shadows and lighting than standard PCA.</a:t>
+            </a:r>
+          </a:p>
+          <a:p>
+            <a:pPr>
+              <a:defRPr sz="1050">
+                <a:solidFill>
+                  <a:srgbClr val="1E293B"/>
+                </a:solidFill>
+              </a:defRPr>
+            </a:pPr>
+            <a:r>
+              <a:t>• Weakness: Suffers from Small Sample Size (SSS) problem if M &lt; D.</a:t>
+            </a:r>
+          </a:p>
+        </p:txBody>
+      </p:sp>
+      <p:sp>
+        <p:nvSpPr>
+          <p:cNvPr id="9" name="Rounded Rectangle 8"/>
+          <p:cNvSpPr/>
+          <p:nvPr/>
+        </p:nvSpPr>
+        <p:spPr>
+          <a:xfrm>
+            <a:off x="8046720" y="1371600"/>
+            <a:ext cx="3383280" cy="4937760"/>
+          </a:xfrm>
+          <a:prstGeom prst="roundRect">
+            <a:avLst/>
+          </a:prstGeom>
+          <a:solidFill>
+            <a:srgbClr val="FFFFFF"/>
+          </a:solidFill>
+          <a:ln w="12700">
+            <a:solidFill>
+              <a:srgbClr val="E2E8F0"/>
+            </a:solidFill>
+          </a:ln>
+        </p:spPr>
+        <p:style>
+          <a:lnRef idx="1">
+            <a:schemeClr val="accent1"/>
+          </a:lnRef>
+          <a:fillRef idx="3">
+            <a:schemeClr val="accent1"/>
+          </a:fillRef>
+          <a:effectRef idx="2">
+            <a:schemeClr val="accent1"/>
+          </a:effectRef>
+          <a:fontRef idx="minor">
+            <a:schemeClr val="lt1"/>
+          </a:fontRef>
+        </p:style>
+        <p:txBody>
+          <a:bodyPr rtlCol="0" anchor="ctr" wrap="square"/>
+          <a:lstStyle/>
+          <a:p>
+            <a:pPr algn="ctr">
+              <a:defRPr sz="1500" b="1">
+                <a:solidFill>
                   <a:srgbClr val="10B981"/>
                 </a:solidFill>
               </a:defRPr>
             </a:pPr>
             <a:r>
-              <a:t>Interactive Web Dashboard (app.py)</a:t>
-            </a:r>
-          </a:p>
-          <a:p>
-            <a:pPr>
-              <a:defRPr sz="1150">
+              <a:t>3. Deep Embeddings</a:t>
+            </a:r>
+          </a:p>
+          <a:p>
+            <a:pPr>
+              <a:defRPr sz="1100">
+                <a:solidFill>
+                  <a:srgbClr val="94A3B8"/>
+                </a:solidFill>
+              </a:defRPr>
+            </a:pPr>
+            <a:r>
+              <a:t>FaceNet / ArcFace (2015+)</a:t>
+            </a:r>
+          </a:p>
+          <a:p>
+            <a:pPr>
+              <a:defRPr sz="1050">
                 <a:solidFill>
                   <a:srgbClr val="1E293B"/>
                 </a:solidFill>
               </a:defRPr>
             </a:pPr>
             <a:r>
-              <a:t>• Execution: python app.py  (Serving on localhost:5050)</a:t>
-            </a:r>
-          </a:p>
-          <a:p>
-            <a:pPr>
-              <a:defRPr sz="1150">
+              <a:t>• Paradigm: Deep Convolutional Neural Networks (CNNs).</a:t>
+            </a:r>
+          </a:p>
+          <a:p>
+            <a:pPr>
+              <a:defRPr sz="1050">
                 <a:solidFill>
                   <a:srgbClr val="1E293B"/>
                 </a:solidFill>
               </a:defRPr>
             </a:pPr>
             <a:r>
-              <a:t>• Interactive Capabilities:</a:t>
-            </a:r>
-          </a:p>
-          <a:p>
-            <a:pPr>
-              <a:defRPr sz="1150">
+              <a:t>• Objective: Non-linear metric learning on hyperspherical embeddings.</a:t>
+            </a:r>
+          </a:p>
+          <a:p>
+            <a:pPr>
+              <a:defRPr sz="1050">
                 <a:solidFill>
                   <a:srgbClr val="1E293B"/>
                 </a:solidFill>
               </a:defRPr>
             </a:pPr>
             <a:r>
-              <a:t>  1. Live Classification Hub: Click probes to see instant 4-way decision with color-coded feedback.</a:t>
-            </a:r>
-          </a:p>
-          <a:p>
-            <a:pPr>
-              <a:defRPr sz="1150">
+              <a:t>• Training Speed: Compute-intensive (hours/days on GPU clusters).</a:t>
+            </a:r>
+          </a:p>
+          <a:p>
+            <a:pPr>
+              <a:defRPr sz="1050">
                 <a:solidFill>
                   <a:srgbClr val="1E293B"/>
                 </a:solidFill>
               </a:defRPr>
             </a:pPr>
             <a:r>
-              <a:t>  2. Reconstruction Lab: Real-time slider (K ∈ [1, 50]) demonstrating progressive face synthesis.</a:t>
-            </a:r>
-          </a:p>
-          <a:p>
-            <a:pPr>
-              <a:defRPr sz="1150">
+              <a:t>• Data Required: Millions of images (MS-Celeb-1M, VGGFace2).</a:t>
+            </a:r>
+          </a:p>
+          <a:p>
+            <a:pPr>
+              <a:defRPr sz="1050">
                 <a:solidFill>
                   <a:srgbClr val="1E293B"/>
                 </a:solidFill>
               </a:defRPr>
             </a:pPr>
             <a:r>
-              <a:t>  3. Eigenface Gallery: Interactive view of 16 ghostly eigenvectors.</a:t>
-            </a:r>
-          </a:p>
-          <a:p>
-            <a:pPr>
-              <a:defRPr sz="1150">
+              <a:t>• Strengths: Invariant to extreme poses, occlusions, and expressions.</a:t>
+            </a:r>
+          </a:p>
+          <a:p>
+            <a:pPr>
+              <a:defRPr sz="1050">
                 <a:solidFill>
                   <a:srgbClr val="1E293B"/>
                 </a:solidFill>
               </a:defRPr>
             </a:pPr>
             <a:r>
-              <a:t>  4. Embedded Theory &amp; Viva Q&amp;A Guide.</a:t>
-            </a:r>
-          </a:p>
-          <a:p>
-            <a:pPr>
-              <a:defRPr sz="1150">
-                <a:solidFill>
-                  <a:srgbClr val="1E293B"/>
-                </a:solidFill>
-              </a:defRPr>
-            </a:pPr>
-            <a:r>
-              <a:t>• Pure vanilla JS/CSS frontend with Flask REST API backend.</a:t>
+              <a:t>• Weakness: Black-box nature, heavy computational demands.</a:t>
             </a:r>
           </a:p>
         </p:txBody>
@@ -4650,7 +4783,7 @@
               </a:defRPr>
             </a:pPr>
             <a:r>
-              <a:t>11. Viva Defense: Anticipated Evaluator Questions</a:t>
+              <a:t>Demonstration Interfaces: CLI Benchmark &amp; Web GUI</a:t>
             </a:r>
           </a:p>
         </p:txBody>
@@ -4664,7 +4797,7 @@
         <p:spPr>
           <a:xfrm>
             <a:off x="731520" y="1371600"/>
-            <a:ext cx="5212080" cy="2331720"/>
+            <a:ext cx="5120640" cy="4937760"/>
           </a:xfrm>
           <a:prstGeom prst="roundRect">
             <a:avLst/>
@@ -4697,14 +4830,38 @@
           <a:lstStyle/>
           <a:p>
             <a:pPr algn="ctr">
-              <a:defRPr sz="1200" b="1">
+              <a:defRPr sz="1600" b="1">
                 <a:solidFill>
                   <a:srgbClr val="2563EB"/>
                 </a:solidFill>
               </a:defRPr>
             </a:pPr>
             <a:r>
-              <a:t>Q1: Why do eigenvectors of Aᵀ A yield eigenvectors of A Aᵀ?</a:t>
+              <a:t>Interactive Web Dashboard (app.py)</a:t>
+            </a:r>
+          </a:p>
+          <a:p>
+            <a:pPr>
+              <a:defRPr sz="1200">
+                <a:solidFill>
+                  <a:srgbClr val="94A3B8"/>
+                </a:solidFill>
+              </a:defRPr>
+            </a:pPr>
+            <a:r>
+              <a:t>Live Interactive Demonstration Interface</a:t>
+            </a:r>
+          </a:p>
+          <a:p>
+            <a:pPr>
+              <a:defRPr sz="1150" b="1">
+                <a:solidFill>
+                  <a:srgbClr val="0F172A"/>
+                </a:solidFill>
+              </a:defRPr>
+            </a:pPr>
+            <a:r>
+              <a:t>• Live Probe Classification:</a:t>
             </a:r>
           </a:p>
           <a:p>
@@ -4716,7 +4873,91 @@
               </a:defRPr>
             </a:pPr>
             <a:r>
-              <a:t>Multiplying Aᵀ A v = μ v by A on the left gives (A Aᵀ)(A v) = μ (A v). Thus u = A v / ||A v|| is an exact eigenvector of the full covariance matrix C.</a:t>
+              <a:t>  Clickable gallery of enrolled subjects, open-set strangers, and synthetic non-faces.</a:t>
+            </a:r>
+          </a:p>
+          <a:p>
+            <a:pPr>
+              <a:defRPr sz="1150" b="1">
+                <a:solidFill>
+                  <a:srgbClr val="0F172A"/>
+                </a:solidFill>
+              </a:defRPr>
+            </a:pPr>
+            <a:r>
+              <a:t>• Visual Status Banners:</a:t>
+            </a:r>
+          </a:p>
+          <a:p>
+            <a:pPr>
+              <a:defRPr sz="1050">
+                <a:solidFill>
+                  <a:srgbClr val="1E293B"/>
+                </a:solidFill>
+              </a:defRPr>
+            </a:pPr>
+            <a:r>
+              <a:t>  Instant color-coded decision outcomes:</a:t>
+            </a:r>
+            <a:br/>
+            <a:r>
+              <a:t>  • Green: Recognized Enrolled Subject</a:t>
+            </a:r>
+            <a:br/>
+            <a:r>
+              <a:t>  • Blue: Detected Unenrolled Stranger</a:t>
+            </a:r>
+            <a:br/>
+            <a:r>
+              <a:t>  • Red: Rejected Non-Face Pattern</a:t>
+            </a:r>
+          </a:p>
+          <a:p>
+            <a:pPr>
+              <a:defRPr sz="1150" b="1">
+                <a:solidFill>
+                  <a:srgbClr val="0F172A"/>
+                </a:solidFill>
+              </a:defRPr>
+            </a:pPr>
+            <a:r>
+              <a:t>• Face Reconstruction Lab:</a:t>
+            </a:r>
+          </a:p>
+          <a:p>
+            <a:pPr>
+              <a:defRPr sz="1050">
+                <a:solidFill>
+                  <a:srgbClr val="1E293B"/>
+                </a:solidFill>
+              </a:defRPr>
+            </a:pPr>
+            <a:r>
+              <a:t>  Interactive slider dynamically adjusts K ∈ [1, 50], visually showing facial details emerging in real time.</a:t>
+            </a:r>
+          </a:p>
+          <a:p>
+            <a:pPr>
+              <a:defRPr sz="1150" b="1">
+                <a:solidFill>
+                  <a:srgbClr val="0F172A"/>
+                </a:solidFill>
+              </a:defRPr>
+            </a:pPr>
+            <a:r>
+              <a:t>• Dual Metric Gauges:</a:t>
+            </a:r>
+          </a:p>
+          <a:p>
+            <a:pPr>
+              <a:defRPr sz="1050">
+                <a:solidFill>
+                  <a:srgbClr val="1E293B"/>
+                </a:solidFill>
+              </a:defRPr>
+            </a:pPr>
+            <a:r>
+              <a:t>  Real-time readout of ε_d (DFFS) and ε_c (DIFS) against calibrated thresholds θ_f and θ_c.</a:t>
             </a:r>
           </a:p>
         </p:txBody>
@@ -4730,7 +4971,7 @@
         <p:spPr>
           <a:xfrm>
             <a:off x="6217920" y="1371600"/>
-            <a:ext cx="5212080" cy="2331720"/>
+            <a:ext cx="5212080" cy="4937760"/>
           </a:xfrm>
           <a:prstGeom prst="roundRect">
             <a:avLst/>
@@ -4763,14 +5004,38 @@
           <a:lstStyle/>
           <a:p>
             <a:pPr algn="ctr">
-              <a:defRPr sz="1200" b="1">
-                <a:solidFill>
-                  <a:srgbClr val="2563EB"/>
-                </a:solidFill>
-              </a:defRPr>
-            </a:pPr>
-            <a:r>
-              <a:t>Q2: Why do eigenfaces exhibit a 'ghostly' appearance?</a:t>
+              <a:defRPr sz="1600" b="1">
+                <a:solidFill>
+                  <a:srgbClr val="10B981"/>
+                </a:solidFill>
+              </a:defRPr>
+            </a:pPr>
+            <a:r>
+              <a:t>Automated Terminal Benchmark (demo.py)</a:t>
+            </a:r>
+          </a:p>
+          <a:p>
+            <a:pPr>
+              <a:defRPr sz="1200">
+                <a:solidFill>
+                  <a:srgbClr val="94A3B8"/>
+                </a:solidFill>
+              </a:defRPr>
+            </a:pPr>
+            <a:r>
+              <a:t>End-to-End Command-Line Pipeline</a:t>
+            </a:r>
+          </a:p>
+          <a:p>
+            <a:pPr>
+              <a:defRPr sz="1150" b="1">
+                <a:solidFill>
+                  <a:srgbClr val="0F172A"/>
+                </a:solidFill>
+              </a:defRPr>
+            </a:pPr>
+            <a:r>
+              <a:t>• Pure NumPy Architecture:</a:t>
             </a:r>
           </a:p>
           <a:p>
@@ -4782,61 +5047,19 @@
               </a:defRPr>
             </a:pPr>
             <a:r>
-              <a:t>Eigenfaces are linear combinations of all centered training faces (u_k = ∑ v_{ki} Φ_i). Adding and subtracting facial features produces high/low intensity variation templates.</a:t>
-            </a:r>
-          </a:p>
-        </p:txBody>
-      </p:sp>
-      <p:sp>
-        <p:nvSpPr>
-          <p:cNvPr id="9" name="Rounded Rectangle 8"/>
-          <p:cNvSpPr/>
-          <p:nvPr/>
-        </p:nvSpPr>
-        <p:spPr>
-          <a:xfrm>
-            <a:off x="731520" y="3886200"/>
-            <a:ext cx="5212080" cy="2331720"/>
-          </a:xfrm>
-          <a:prstGeom prst="roundRect">
-            <a:avLst/>
-          </a:prstGeom>
-          <a:solidFill>
-            <a:srgbClr val="FFFFFF"/>
-          </a:solidFill>
-          <a:ln w="12700">
-            <a:solidFill>
-              <a:srgbClr val="E2E8F0"/>
-            </a:solidFill>
-          </a:ln>
-        </p:spPr>
-        <p:style>
-          <a:lnRef idx="1">
-            <a:schemeClr val="accent1"/>
-          </a:lnRef>
-          <a:fillRef idx="3">
-            <a:schemeClr val="accent1"/>
-          </a:fillRef>
-          <a:effectRef idx="2">
-            <a:schemeClr val="accent1"/>
-          </a:effectRef>
-          <a:fontRef idx="minor">
-            <a:schemeClr val="lt1"/>
-          </a:fontRef>
-        </p:style>
-        <p:txBody>
-          <a:bodyPr rtlCol="0" anchor="ctr" wrap="square"/>
-          <a:lstStyle/>
-          <a:p>
-            <a:pPr algn="ctr">
-              <a:defRPr sz="1200" b="1">
-                <a:solidFill>
-                  <a:srgbClr val="2563EB"/>
-                </a:solidFill>
-              </a:defRPr>
-            </a:pPr>
-            <a:r>
-              <a:t>Q3: What distinguishes DFFS from DIFS?</a:t>
+              <a:t>  100% from-scratch linear algebra without scikit-learn PCA black-boxes.</a:t>
+            </a:r>
+          </a:p>
+          <a:p>
+            <a:pPr>
+              <a:defRPr sz="1150" b="1">
+                <a:solidFill>
+                  <a:srgbClr val="0F172A"/>
+                </a:solidFill>
+              </a:defRPr>
+            </a:pPr>
+            <a:r>
+              <a:t>• Diagnostic Telemetry:</a:t>
             </a:r>
           </a:p>
           <a:p>
@@ -4848,61 +5071,19 @@
               </a:defRPr>
             </a:pPr>
             <a:r>
-              <a:t>DFFS (ε_d = ||Γ - Γ̂||) evaluates orthogonal residual to decide if input is a face. DIFS (ε_c = min ||Ω - Ω_k||) measures distance to known identities.</a:t>
-            </a:r>
-          </a:p>
-        </p:txBody>
-      </p:sp>
-      <p:sp>
-        <p:nvSpPr>
-          <p:cNvPr id="10" name="Rounded Rectangle 9"/>
-          <p:cNvSpPr/>
-          <p:nvPr/>
-        </p:nvSpPr>
-        <p:spPr>
-          <a:xfrm>
-            <a:off x="6217920" y="3886200"/>
-            <a:ext cx="5212080" cy="2331720"/>
-          </a:xfrm>
-          <a:prstGeom prst="roundRect">
-            <a:avLst/>
-          </a:prstGeom>
-          <a:solidFill>
-            <a:srgbClr val="FFFFFF"/>
-          </a:solidFill>
-          <a:ln w="12700">
-            <a:solidFill>
-              <a:srgbClr val="E2E8F0"/>
-            </a:solidFill>
-          </a:ln>
-        </p:spPr>
-        <p:style>
-          <a:lnRef idx="1">
-            <a:schemeClr val="accent1"/>
-          </a:lnRef>
-          <a:fillRef idx="3">
-            <a:schemeClr val="accent1"/>
-          </a:fillRef>
-          <a:effectRef idx="2">
-            <a:schemeClr val="accent1"/>
-          </a:effectRef>
-          <a:fontRef idx="minor">
-            <a:schemeClr val="lt1"/>
-          </a:fontRef>
-        </p:style>
-        <p:txBody>
-          <a:bodyPr rtlCol="0" anchor="ctr" wrap="square"/>
-          <a:lstStyle/>
-          <a:p>
-            <a:pPr algn="ctr">
-              <a:defRPr sz="1200" b="1">
-                <a:solidFill>
-                  <a:srgbClr val="2563EB"/>
-                </a:solidFill>
-              </a:defRPr>
-            </a:pPr>
-            <a:r>
-              <a:t>Q4: How did Fisherfaces (LDA) improve upon Eigenfaces?</a:t>
+              <a:t>  Outputs detailed matrix dimensions, reduction factors (279.5×), and eigen-decomposition timings.</a:t>
+            </a:r>
+          </a:p>
+          <a:p>
+            <a:pPr>
+              <a:defRPr sz="1150" b="1">
+                <a:solidFill>
+                  <a:srgbClr val="0F172A"/>
+                </a:solidFill>
+              </a:defRPr>
+            </a:pPr>
+            <a:r>
+              <a:t>• Automated Evaluation:</a:t>
             </a:r>
           </a:p>
           <a:p>
@@ -4914,7 +5095,31 @@
               </a:defRPr>
             </a:pPr>
             <a:r>
-              <a:t>PCA is unsupervised and merges lighting variance with identity. Fisherfaces (Belhumeur 1997) maximizes between-class scatter over within-class scatter, resisting lighting changes.</a:t>
+              <a:t>  Executes 4-way decision matrix across all probe sets and outputs confusion statistics.</a:t>
+            </a:r>
+          </a:p>
+          <a:p>
+            <a:pPr>
+              <a:defRPr sz="1150" b="1">
+                <a:solidFill>
+                  <a:srgbClr val="0F172A"/>
+                </a:solidFill>
+              </a:defRPr>
+            </a:pPr>
+            <a:r>
+              <a:t>• Publication-Grade Plots:</a:t>
+            </a:r>
+          </a:p>
+          <a:p>
+            <a:pPr>
+              <a:defRPr sz="1050">
+                <a:solidFill>
+                  <a:srgbClr val="1E293B"/>
+                </a:solidFill>
+              </a:defRPr>
+            </a:pPr>
+            <a:r>
+              <a:t>  Automatically generates all 6 analytical figures in the results/ directory.</a:t>
             </a:r>
           </a:p>
         </p:txBody>
@@ -4995,7 +5200,7 @@
             <a:avLst/>
           </a:prstGeom>
           <a:solidFill>
-            <a:srgbClr val="2563EB"/>
+            <a:srgbClr val="06B6D4"/>
           </a:solidFill>
           <a:ln>
             <a:noFill/>
@@ -5032,7 +5237,7 @@
         <p:spPr>
           <a:xfrm>
             <a:off x="914400" y="731520"/>
-            <a:ext cx="10332720" cy="914400"/>
+            <a:ext cx="10332720" cy="1005840"/>
           </a:xfrm>
           <a:prstGeom prst="rect">
             <a:avLst/>
@@ -5046,14 +5251,26 @@
           <a:lstStyle/>
           <a:p>
             <a:pPr>
-              <a:defRPr sz="3200" b="1">
+              <a:defRPr sz="2800" b="1">
                 <a:solidFill>
                   <a:srgbClr val="FFFFFF"/>
                 </a:solidFill>
               </a:defRPr>
             </a:pPr>
             <a:r>
-              <a:t>Key Takeaways &amp; Conclusion</a:t>
+              <a:t>Summary of Contributions &amp; Academic Takeaways</a:t>
+            </a:r>
+          </a:p>
+          <a:p>
+            <a:pPr>
+              <a:defRPr sz="1400">
+                <a:solidFill>
+                  <a:srgbClr val="06B6D4"/>
+                </a:solidFill>
+              </a:defRPr>
+            </a:pPr>
+            <a:r>
+              <a:t>Eigenfaces (Turk &amp; Pentland, 1991) Implementation</a:t>
             </a:r>
           </a:p>
         </p:txBody>
@@ -5066,8 +5283,8 @@
         </p:nvSpPr>
         <p:spPr>
           <a:xfrm>
-            <a:off x="914400" y="1828800"/>
-            <a:ext cx="3291840" cy="4114800"/>
+            <a:off x="914400" y="1920240"/>
+            <a:ext cx="10360152" cy="4297680"/>
           </a:xfrm>
           <a:prstGeom prst="roundRect">
             <a:avLst/>
@@ -5077,7 +5294,7 @@
           </a:solidFill>
           <a:ln w="12700">
             <a:solidFill>
-              <a:srgbClr val="06B6D4"/>
+              <a:srgbClr val="2563EB"/>
             </a:solidFill>
           </a:ln>
         </p:spPr>
@@ -5099,234 +5316,139 @@
           <a:bodyPr rtlCol="0" anchor="ctr" wrap="square"/>
           <a:lstStyle/>
           <a:p>
+            <a:pPr algn="ctr"/>
+          </a:p>
+          <a:p>
+            <a:pPr>
+              <a:defRPr sz="1300" b="1">
+                <a:solidFill>
+                  <a:srgbClr val="F59E0B"/>
+                </a:solidFill>
+              </a:defRPr>
+            </a:pPr>
+            <a:r>
+              <a:t>•  1. Mathematical Rigor:</a:t>
+            </a:r>
+          </a:p>
+          <a:p>
+            <a:pPr>
+              <a:defRPr sz="1150">
+                <a:solidFill>
+                  <a:srgbClr val="FFFFFF"/>
+                </a:solidFill>
+              </a:defRPr>
+            </a:pPr>
+            <a:r>
+              <a:t>   Implemented exact PCA and Turk-Pentland surrogate trick (L = A^T A) using pure linear algebra in NumPy, reducing computation by 279.5×.</a:t>
+            </a:r>
+          </a:p>
+          <a:p>
+            <a:pPr>
+              <a:defRPr sz="1300" b="1">
+                <a:solidFill>
+                  <a:srgbClr val="F59E0B"/>
+                </a:solidFill>
+              </a:defRPr>
+            </a:pPr>
+            <a:r>
+              <a:t>•  2. High Compression Ratio:</a:t>
+            </a:r>
+          </a:p>
+          <a:p>
+            <a:pPr>
+              <a:defRPr sz="1150">
+                <a:solidFill>
+                  <a:srgbClr val="FFFFFF"/>
+                </a:solidFill>
+              </a:defRPr>
+            </a:pPr>
+            <a:r>
+              <a:t>   Compressed 4,096-pixel facial images into 40 scalar weights (99.02% reduction) while preserving ~90% recognition accuracy.</a:t>
+            </a:r>
+          </a:p>
+          <a:p>
+            <a:pPr>
+              <a:defRPr sz="1300" b="1">
+                <a:solidFill>
+                  <a:srgbClr val="F59E0B"/>
+                </a:solidFill>
+              </a:defRPr>
+            </a:pPr>
+            <a:r>
+              <a:t>•  3. Complete 4-Way Decision Framework:</a:t>
+            </a:r>
+          </a:p>
+          <a:p>
+            <a:pPr>
+              <a:defRPr sz="1150">
+                <a:solidFill>
+                  <a:srgbClr val="FFFFFF"/>
+                </a:solidFill>
+              </a:defRPr>
+            </a:pPr>
+            <a:r>
+              <a:t>   Dual thresholds (θ_f and θ_c) accurately discriminate between enrolled subjects, unknown human strangers, and non-face objects.</a:t>
+            </a:r>
+          </a:p>
+          <a:p>
+            <a:pPr>
+              <a:defRPr sz="1300" b="1">
+                <a:solidFill>
+                  <a:srgbClr val="F59E0B"/>
+                </a:solidFill>
+              </a:defRPr>
+            </a:pPr>
+            <a:r>
+              <a:t>•  4. Edge Computing Suitability:</a:t>
+            </a:r>
+          </a:p>
+          <a:p>
+            <a:pPr>
+              <a:defRPr sz="1150">
+                <a:solidFill>
+                  <a:srgbClr val="FFFFFF"/>
+                </a:solidFill>
+              </a:defRPr>
+            </a:pPr>
+            <a:r>
+              <a:t>   Instantaneous CPU training (~0.14 s) and microsecond inference make it ideal for embedded biometric IoT devices.</a:t>
+            </a:r>
+          </a:p>
+          <a:p>
+            <a:pPr>
+              <a:defRPr sz="1300" b="1">
+                <a:solidFill>
+                  <a:srgbClr val="F59E0B"/>
+                </a:solidFill>
+              </a:defRPr>
+            </a:pPr>
+            <a:r>
+              <a:t>•  5. Open-Source Verification:</a:t>
+            </a:r>
+          </a:p>
+          <a:p>
+            <a:pPr>
+              <a:defRPr sz="1150">
+                <a:solidFill>
+                  <a:srgbClr val="FFFFFF"/>
+                </a:solidFill>
+              </a:defRPr>
+            </a:pPr>
+            <a:r>
+              <a:t>   Fully reproducible codebase with CLI benchmarks, interactive GUI dashboard, and comprehensive test suite.</a:t>
+            </a:r>
+          </a:p>
+          <a:p>
+            <a:br/>
             <a:pPr algn="ctr">
-              <a:defRPr sz="1500" b="1">
+              <a:defRPr sz="1600" b="1">
                 <a:solidFill>
                   <a:srgbClr val="06B6D4"/>
                 </a:solidFill>
               </a:defRPr>
             </a:pPr>
             <a:r>
-              <a:t>Mathematical Elegance</a:t>
-            </a:r>
-          </a:p>
-          <a:p/>
-          <a:p>
-            <a:pPr>
-              <a:defRPr sz="1200">
-                <a:solidFill>
-                  <a:srgbClr val="F1F5F9"/>
-                </a:solidFill>
-              </a:defRPr>
-            </a:pPr>
-            <a:r>
-              <a:t>• Pure linear algebra implementation with no ML shortcuts.</a:t>
-            </a:r>
-          </a:p>
-          <a:p>
-            <a:pPr>
-              <a:defRPr sz="1200">
-                <a:solidFill>
-                  <a:srgbClr val="F1F5F9"/>
-                </a:solidFill>
-              </a:defRPr>
-            </a:pPr>
-            <a:r>
-              <a:t>• Covariance trick reduces matrix size by 279.5×.</a:t>
-            </a:r>
-          </a:p>
-          <a:p>
-            <a:pPr>
-              <a:defRPr sz="1200">
-                <a:solidFill>
-                  <a:srgbClr val="F1F5F9"/>
-                </a:solidFill>
-              </a:defRPr>
-            </a:pPr>
-            <a:r>
-              <a:t>• Orthogonal projection eliminates redundant pixel data.</a:t>
-            </a:r>
-          </a:p>
-        </p:txBody>
-      </p:sp>
-      <p:sp>
-        <p:nvSpPr>
-          <p:cNvPr id="6" name="Rounded Rectangle 5"/>
-          <p:cNvSpPr/>
-          <p:nvPr/>
-        </p:nvSpPr>
-        <p:spPr>
-          <a:xfrm>
-            <a:off x="4434840" y="1828800"/>
-            <a:ext cx="3291840" cy="4114800"/>
-          </a:xfrm>
-          <a:prstGeom prst="roundRect">
-            <a:avLst/>
-          </a:prstGeom>
-          <a:solidFill>
-            <a:srgbClr val="1E293B"/>
-          </a:solidFill>
-          <a:ln w="12700">
-            <a:solidFill>
-              <a:srgbClr val="F59E0B"/>
-            </a:solidFill>
-          </a:ln>
-        </p:spPr>
-        <p:style>
-          <a:lnRef idx="1">
-            <a:schemeClr val="accent1"/>
-          </a:lnRef>
-          <a:fillRef idx="3">
-            <a:schemeClr val="accent1"/>
-          </a:fillRef>
-          <a:effectRef idx="2">
-            <a:schemeClr val="accent1"/>
-          </a:effectRef>
-          <a:fontRef idx="minor">
-            <a:schemeClr val="lt1"/>
-          </a:fontRef>
-        </p:style>
-        <p:txBody>
-          <a:bodyPr rtlCol="0" anchor="ctr" wrap="square"/>
-          <a:lstStyle/>
-          <a:p>
-            <a:pPr algn="ctr">
-              <a:defRPr sz="1500" b="1">
-                <a:solidFill>
-                  <a:srgbClr val="F59E0B"/>
-                </a:solidFill>
-              </a:defRPr>
-            </a:pPr>
-            <a:r>
-              <a:t>Robust 4-Way Decision</a:t>
-            </a:r>
-          </a:p>
-          <a:p/>
-          <a:p>
-            <a:pPr>
-              <a:defRPr sz="1200">
-                <a:solidFill>
-                  <a:srgbClr val="F1F5F9"/>
-                </a:solidFill>
-              </a:defRPr>
-            </a:pPr>
-            <a:r>
-              <a:t>• Dual-threshold rule reliably rejects non-faces (ε_d ≥ θ_f).</a:t>
-            </a:r>
-          </a:p>
-          <a:p>
-            <a:pPr>
-              <a:defRPr sz="1200">
-                <a:solidFill>
-                  <a:srgbClr val="F1F5F9"/>
-                </a:solidFill>
-              </a:defRPr>
-            </a:pPr>
-            <a:r>
-              <a:t>• Discriminates enrolled vs unseen human subjects.</a:t>
-            </a:r>
-          </a:p>
-          <a:p>
-            <a:pPr>
-              <a:defRPr sz="1200">
-                <a:solidFill>
-                  <a:srgbClr val="F1F5F9"/>
-                </a:solidFill>
-              </a:defRPr>
-            </a:pPr>
-            <a:r>
-              <a:t>• High accuracy (&gt;88%) achieved with just 30-50 components.</a:t>
-            </a:r>
-          </a:p>
-        </p:txBody>
-      </p:sp>
-      <p:sp>
-        <p:nvSpPr>
-          <p:cNvPr id="7" name="Rounded Rectangle 6"/>
-          <p:cNvSpPr/>
-          <p:nvPr/>
-        </p:nvSpPr>
-        <p:spPr>
-          <a:xfrm>
-            <a:off x="7955279" y="1828800"/>
-            <a:ext cx="3291840" cy="4114800"/>
-          </a:xfrm>
-          <a:prstGeom prst="roundRect">
-            <a:avLst/>
-          </a:prstGeom>
-          <a:solidFill>
-            <a:srgbClr val="1E293B"/>
-          </a:solidFill>
-          <a:ln w="12700">
-            <a:solidFill>
-              <a:srgbClr val="10B981"/>
-            </a:solidFill>
-          </a:ln>
-        </p:spPr>
-        <p:style>
-          <a:lnRef idx="1">
-            <a:schemeClr val="accent1"/>
-          </a:lnRef>
-          <a:fillRef idx="3">
-            <a:schemeClr val="accent1"/>
-          </a:fillRef>
-          <a:effectRef idx="2">
-            <a:schemeClr val="accent1"/>
-          </a:effectRef>
-          <a:fontRef idx="minor">
-            <a:schemeClr val="lt1"/>
-          </a:fontRef>
-        </p:style>
-        <p:txBody>
-          <a:bodyPr rtlCol="0" anchor="ctr" wrap="square"/>
-          <a:lstStyle/>
-          <a:p>
-            <a:pPr algn="ctr">
-              <a:defRPr sz="1500" b="1">
-                <a:solidFill>
-                  <a:srgbClr val="10B981"/>
-                </a:solidFill>
-              </a:defRPr>
-            </a:pPr>
-            <a:r>
-              <a:t>Engineering Completeness</a:t>
-            </a:r>
-          </a:p>
-          <a:p/>
-          <a:p>
-            <a:pPr>
-              <a:defRPr sz="1200">
-                <a:solidFill>
-                  <a:srgbClr val="F1F5F9"/>
-                </a:solidFill>
-              </a:defRPr>
-            </a:pPr>
-            <a:r>
-              <a:t>• Production-quality CLI telemetry and reproducible benchmark.</a:t>
-            </a:r>
-          </a:p>
-          <a:p>
-            <a:pPr>
-              <a:defRPr sz="1200">
-                <a:solidFill>
-                  <a:srgbClr val="F1F5F9"/>
-                </a:solidFill>
-              </a:defRPr>
-            </a:pPr>
-            <a:r>
-              <a:t>• Interactive web application with real-time synthesis slider.</a:t>
-            </a:r>
-          </a:p>
-          <a:p>
-            <a:pPr>
-              <a:defRPr sz="1200">
-                <a:solidFill>
-                  <a:srgbClr val="F1F5F9"/>
-                </a:solidFill>
-              </a:defRPr>
-            </a:pPr>
-            <a:r>
-              <a:t>• Complete academic defense documentation and guide.</a:t>
+              <a:t>Thank You! Ready for Questions &amp; Discussion.</a:t>
             </a:r>
           </a:p>
         </p:txBody>
@@ -5543,7 +5665,7 @@
               </a:defRPr>
             </a:pPr>
             <a:r>
-              <a:t>1. Problem Formulation &amp; Historical Context</a:t>
+              <a:t>Motivation &amp; The Paradigm Shift in Face Recognition</a:t>
             </a:r>
           </a:p>
         </p:txBody>
@@ -5597,91 +5719,139 @@
               </a:defRPr>
             </a:pPr>
             <a:r>
-              <a:t>Traditional 1980s Approach: Geometric Features</a:t>
+              <a:t>Traditional Approach (Pre-1991)</a:t>
             </a:r>
           </a:p>
           <a:p>
             <a:pPr>
               <a:defRPr sz="1200">
                 <a:solidFill>
+                  <a:srgbClr val="94A3B8"/>
+                </a:solidFill>
+              </a:defRPr>
+            </a:pPr>
+            <a:r>
+              <a:t>Geometric Feature Extraction</a:t>
+            </a:r>
+          </a:p>
+          <a:p>
+            <a:pPr>
+              <a:defRPr sz="1150" b="1">
+                <a:solidFill>
+                  <a:srgbClr val="0F172A"/>
+                </a:solidFill>
+              </a:defRPr>
+            </a:pPr>
+            <a:r>
+              <a:t>• Manual Geometry Measurement:</a:t>
+            </a:r>
+          </a:p>
+          <a:p>
+            <a:pPr>
+              <a:defRPr sz="1050">
+                <a:solidFill>
                   <a:srgbClr val="1E293B"/>
                 </a:solidFill>
               </a:defRPr>
             </a:pPr>
             <a:r>
-              <a:t>Relied on explicitly locating facial landmarks (eye corners, nose tip, mouth edges, chin contour).</a:t>
-            </a:r>
-          </a:p>
-          <a:p>
-            <a:pPr>
-              <a:defRPr sz="1200">
+              <a:t>  Tried to measure distances between pupils, nose width, lip length, and jaw curvature.</a:t>
+            </a:r>
+          </a:p>
+          <a:p>
+            <a:pPr>
+              <a:defRPr sz="1150" b="1">
+                <a:solidFill>
+                  <a:srgbClr val="0F172A"/>
+                </a:solidFill>
+              </a:defRPr>
+            </a:pPr>
+            <a:r>
+              <a:t>• High Sensitivity to Pose:</a:t>
+            </a:r>
+          </a:p>
+          <a:p>
+            <a:pPr>
+              <a:defRPr sz="1050">
                 <a:solidFill>
                   <a:srgbClr val="1E293B"/>
                 </a:solidFill>
               </a:defRPr>
             </a:pPr>
             <a:r>
-              <a:t>Measured hand-crafted geometric distances and ratios between landmark coordinates.</a:t>
-            </a:r>
-          </a:p>
-          <a:p>
-            <a:pPr>
-              <a:defRPr sz="1200">
+              <a:t>  Even a small head tilt or rotation dramatically altered calculated distances.</a:t>
+            </a:r>
+          </a:p>
+          <a:p>
+            <a:pPr>
+              <a:defRPr sz="1150" b="1">
+                <a:solidFill>
+                  <a:srgbClr val="0F172A"/>
+                </a:solidFill>
+              </a:defRPr>
+            </a:pPr>
+            <a:r>
+              <a:t>• Expression Sensitivity:</a:t>
+            </a:r>
+          </a:p>
+          <a:p>
+            <a:pPr>
+              <a:defRPr sz="1050">
                 <a:solidFill>
                   <a:srgbClr val="1E293B"/>
                 </a:solidFill>
               </a:defRPr>
             </a:pPr>
             <a:r>
-              <a:t>Major Vulnerabilities:</a:t>
-            </a:r>
-          </a:p>
-          <a:p>
-            <a:pPr>
-              <a:defRPr sz="1200">
+              <a:t>  Smiling, blinking, or talking changed feature coordinates and broke matching.</a:t>
+            </a:r>
+          </a:p>
+          <a:p>
+            <a:pPr>
+              <a:defRPr sz="1150" b="1">
+                <a:solidFill>
+                  <a:srgbClr val="0F172A"/>
+                </a:solidFill>
+              </a:defRPr>
+            </a:pPr>
+            <a:r>
+              <a:t>• Lighting Vulnerability:</a:t>
+            </a:r>
+          </a:p>
+          <a:p>
+            <a:pPr>
+              <a:defRPr sz="1050">
                 <a:solidFill>
                   <a:srgbClr val="1E293B"/>
                 </a:solidFill>
               </a:defRPr>
             </a:pPr>
             <a:r>
-              <a:t>  • Landmark localization errors cascade and destroy recognition.</a:t>
-            </a:r>
-          </a:p>
-          <a:p>
-            <a:pPr>
-              <a:defRPr sz="1200">
+              <a:t>  Shadows caused edge detectors to miss feature boundaries entirely.</a:t>
+            </a:r>
+          </a:p>
+          <a:p>
+            <a:pPr>
+              <a:defRPr sz="1150" b="1">
+                <a:solidFill>
+                  <a:srgbClr val="0F172A"/>
+                </a:solidFill>
+              </a:defRPr>
+            </a:pPr>
+            <a:r>
+              <a:t>• Conclusion:</a:t>
+            </a:r>
+          </a:p>
+          <a:p>
+            <a:pPr>
+              <a:defRPr sz="1050">
                 <a:solidFill>
                   <a:srgbClr val="1E293B"/>
                 </a:solidFill>
               </a:defRPr>
             </a:pPr>
             <a:r>
-              <a:t>  • Extreme sensitivity to non-rigid deformations (smiles, frowns).</a:t>
-            </a:r>
-          </a:p>
-          <a:p>
-            <a:pPr>
-              <a:defRPr sz="1200">
-                <a:solidFill>
-                  <a:srgbClr val="1E293B"/>
-                </a:solidFill>
-              </a:defRPr>
-            </a:pPr>
-            <a:r>
-              <a:t>  • Complete breakdown under illumination variations and shadows.</a:t>
-            </a:r>
-          </a:p>
-          <a:p>
-            <a:pPr>
-              <a:defRPr sz="1200">
-                <a:solidFill>
-                  <a:srgbClr val="1E293B"/>
-                </a:solidFill>
-              </a:defRPr>
-            </a:pPr>
-            <a:r>
-              <a:t>High computational burden for landmark extraction with low accuracy.</a:t>
+              <a:t>  Complex, slow, and brittle for automated real-time recognition.</a:t>
             </a:r>
           </a:p>
         </p:txBody>
@@ -5730,96 +5900,144 @@
             <a:pPr algn="ctr">
               <a:defRPr sz="1600" b="1">
                 <a:solidFill>
-                  <a:srgbClr val="2563EB"/>
-                </a:solidFill>
-              </a:defRPr>
-            </a:pPr>
-            <a:r>
-              <a:t>Turk &amp; Pentland (1991): Holistic Subspace</a:t>
+                  <a:srgbClr val="10B981"/>
+                </a:solidFill>
+              </a:defRPr>
+            </a:pPr>
+            <a:r>
+              <a:t>The Turk &amp; Pentland Breakthrough (1991)</a:t>
             </a:r>
           </a:p>
           <a:p>
             <a:pPr>
               <a:defRPr sz="1200">
                 <a:solidFill>
+                  <a:srgbClr val="94A3B8"/>
+                </a:solidFill>
+              </a:defRPr>
+            </a:pPr>
+            <a:r>
+              <a:t>Holistic Information-Theoretic Approach</a:t>
+            </a:r>
+          </a:p>
+          <a:p>
+            <a:pPr>
+              <a:defRPr sz="1150" b="1">
+                <a:solidFill>
+                  <a:srgbClr val="0F172A"/>
+                </a:solidFill>
+              </a:defRPr>
+            </a:pPr>
+            <a:r>
+              <a:t>• Treat Whole Image as a Pattern:</a:t>
+            </a:r>
+          </a:p>
+          <a:p>
+            <a:pPr>
+              <a:defRPr sz="1050">
+                <a:solidFill>
                   <a:srgbClr val="1E293B"/>
                 </a:solidFill>
               </a:defRPr>
             </a:pPr>
             <a:r>
-              <a:t>Radical Paradigm Shift: Treat faces as continuous 2D intensity distributions rather than sets of geometric features.</a:t>
-            </a:r>
-          </a:p>
-          <a:p>
-            <a:pPr>
-              <a:defRPr sz="1200">
+              <a:t>  Does not isolate eyes, nose, or mouth. Analyzes the face as a single 2D brightness distribution.</a:t>
+            </a:r>
+          </a:p>
+          <a:p>
+            <a:pPr>
+              <a:defRPr sz="1150" b="1">
+                <a:solidFill>
+                  <a:srgbClr val="0F172A"/>
+                </a:solidFill>
+              </a:defRPr>
+            </a:pPr>
+            <a:r>
+              <a:t>• Subspace Information Coding:</a:t>
+            </a:r>
+          </a:p>
+          <a:p>
+            <a:pPr>
+              <a:defRPr sz="1050">
                 <a:solidFill>
                   <a:srgbClr val="1E293B"/>
                 </a:solidFill>
               </a:defRPr>
             </a:pPr>
             <a:r>
-              <a:t>Information-Theoretic Modeling: Capture the statistical variation across the entire face ensemble using Principal Component Analysis (PCA).</a:t>
-            </a:r>
-          </a:p>
-          <a:p>
-            <a:pPr>
-              <a:defRPr sz="1200">
+              <a:t>  Captures features that best account for the variation across the entire collection of faces.</a:t>
+            </a:r>
+          </a:p>
+          <a:p>
+            <a:pPr>
+              <a:defRPr sz="1150" b="1">
+                <a:solidFill>
+                  <a:srgbClr val="0F172A"/>
+                </a:solidFill>
+              </a:defRPr>
+            </a:pPr>
+            <a:r>
+              <a:t>• Dimensionality Reduction:</a:t>
+            </a:r>
+          </a:p>
+          <a:p>
+            <a:pPr>
+              <a:defRPr sz="1050">
                 <a:solidFill>
                   <a:srgbClr val="1E293B"/>
                 </a:solidFill>
               </a:defRPr>
             </a:pPr>
             <a:r>
-              <a:t>The 'Face Space' Concept:</a:t>
-            </a:r>
-          </a:p>
-          <a:p>
-            <a:pPr>
-              <a:defRPr sz="1200">
+              <a:t>  Projects high-dimensional image space onto a tiny subspace spanning only the prominent variations.</a:t>
+            </a:r>
+          </a:p>
+          <a:p>
+            <a:pPr>
+              <a:defRPr sz="1150" b="1">
+                <a:solidFill>
+                  <a:srgbClr val="0F172A"/>
+                </a:solidFill>
+              </a:defRPr>
+            </a:pPr>
+            <a:r>
+              <a:t>• Real-Time Execution:</a:t>
+            </a:r>
+          </a:p>
+          <a:p>
+            <a:pPr>
+              <a:defRPr sz="1050">
                 <a:solidFill>
                   <a:srgbClr val="1E293B"/>
                 </a:solidFill>
               </a:defRPr>
             </a:pPr>
             <a:r>
-              <a:t>  • High-dimensional image space ($D = 4096$) is heavily redundant.</a:t>
-            </a:r>
-          </a:p>
-          <a:p>
-            <a:pPr>
-              <a:defRPr sz="1200">
+              <a:t>  Recognition reduces to a simple Euclidean distance calculation among a few dozen scalar weights.</a:t>
+            </a:r>
+          </a:p>
+          <a:p>
+            <a:pPr>
+              <a:defRPr sz="1150" b="1">
+                <a:solidFill>
+                  <a:srgbClr val="0F172A"/>
+                </a:solidFill>
+              </a:defRPr>
+            </a:pPr>
+            <a:r>
+              <a:t>• Foundational Landmark:</a:t>
+            </a:r>
+          </a:p>
+          <a:p>
+            <a:pPr>
+              <a:defRPr sz="1050">
                 <a:solidFill>
                   <a:srgbClr val="1E293B"/>
                 </a:solidFill>
               </a:defRPr>
             </a:pPr>
             <a:r>
-              <a:t>  • Human faces occupy a compact low-dimensional subspace ($K \approx 30-50$).</a:t>
-            </a:r>
-          </a:p>
-          <a:p>
-            <a:pPr>
-              <a:defRPr sz="1200">
-                <a:solidFill>
-                  <a:srgbClr val="1E293B"/>
-                </a:solidFill>
-              </a:defRPr>
-            </a:pPr>
-            <a:r>
-              <a:t>  • Unsupervised: finds optimal orthogonal basis vectors directly from raw pixels.</a:t>
-            </a:r>
-          </a:p>
-          <a:p>
-            <a:pPr>
-              <a:defRPr sz="1200">
-                <a:solidFill>
-                  <a:srgbClr val="1E293B"/>
-                </a:solidFill>
-              </a:defRPr>
-            </a:pPr>
-            <a:r>
-              <a:t>Fast recognition using simple vector projections in low-dimensional space.</a:t>
+              <a:t>  Established the principle of appearance-based subspace learning in computer vision.</a:t>
             </a:r>
           </a:p>
         </p:txBody>
@@ -6036,7 +6254,7 @@
               </a:defRPr>
             </a:pPr>
             <a:r>
-              <a:t>2. End-to-End System Pipeline Architecture</a:t>
+              <a:t>Mathematical Subspace: Image Vectorization &amp; Mean Face</a:t>
             </a:r>
           </a:p>
         </p:txBody>
@@ -6050,7 +6268,7 @@
         <p:spPr>
           <a:xfrm>
             <a:off x="731520" y="1371600"/>
-            <a:ext cx="2560320" cy="3931920"/>
+            <a:ext cx="3291840" cy="4937760"/>
           </a:xfrm>
           <a:prstGeom prst="roundRect">
             <a:avLst/>
@@ -6083,39 +6301,38 @@
           <a:lstStyle/>
           <a:p>
             <a:pPr algn="ctr">
-              <a:defRPr sz="1000" b="1">
-                <a:solidFill>
-                  <a:srgbClr val="06B6D4"/>
-                </a:solidFill>
-              </a:defRPr>
-            </a:pPr>
-            <a:r>
-              <a:t>STAGE 1</a:t>
-            </a:r>
-          </a:p>
-          <a:p>
-            <a:pPr>
-              <a:defRPr sz="1400" b="1">
-                <a:solidFill>
-                  <a:srgbClr val="0F172A"/>
-                </a:solidFill>
-              </a:defRPr>
-            </a:pPr>
-            <a:r>
-              <a:t>Data Preprocessing</a:t>
-            </a:r>
-          </a:p>
-          <a:p/>
+              <a:defRPr sz="1500" b="1">
+                <a:solidFill>
+                  <a:srgbClr val="2563EB"/>
+                </a:solidFill>
+              </a:defRPr>
+            </a:pPr>
+            <a:r>
+              <a:t>1. Image Vectorization</a:t>
+            </a:r>
+          </a:p>
           <a:p>
             <a:pPr>
               <a:defRPr sz="1100">
                 <a:solidFill>
+                  <a:srgbClr val="94A3B8"/>
+                </a:solidFill>
+              </a:defRPr>
+            </a:pPr>
+            <a:r>
+              <a:t>From 2D Pixel Grid to High-Dimensional Vector</a:t>
+            </a:r>
+          </a:p>
+          <a:p>
+            <a:pPr>
+              <a:defRPr sz="1100">
+                <a:solidFill>
                   <a:srgbClr val="1E293B"/>
                 </a:solidFill>
               </a:defRPr>
             </a:pPr>
             <a:r>
-              <a:t>• Grayscale normalization</a:t>
+              <a:t>• Standard image dimensions: N × N = 64 × 64 pixels.</a:t>
             </a:r>
           </a:p>
           <a:p>
@@ -6127,7 +6344,7 @@
               </a:defRPr>
             </a:pPr>
             <a:r>
-              <a:t>• Resize to uniform N×N (64×64)</a:t>
+              <a:t>• Unrolled into a single column vector: Γ ∈ ℝ^D, where D = 4,096.</a:t>
             </a:r>
           </a:p>
           <a:p>
@@ -6139,7 +6356,7 @@
               </a:defRPr>
             </a:pPr>
             <a:r>
-              <a:t>• Flatten into vector Γ ∈ ℝ⁴⁰⁹⁶</a:t>
+              <a:t>• Pixel values are normalized grayscale intensities in range [0, 1].</a:t>
             </a:r>
           </a:p>
           <a:p>
@@ -6151,7 +6368,7 @@
               </a:defRPr>
             </a:pPr>
             <a:r>
-              <a:t>• Partition into Train &amp; Test</a:t>
+              <a:t>• Every face is treated as a single point in a 4,096-dimensional space.</a:t>
             </a:r>
           </a:p>
         </p:txBody>
@@ -6164,8 +6381,8 @@
         </p:nvSpPr>
         <p:spPr>
           <a:xfrm>
-            <a:off x="3456432" y="1371600"/>
-            <a:ext cx="2560320" cy="3931920"/>
+            <a:off x="4389120" y="1371600"/>
+            <a:ext cx="3291840" cy="4937760"/>
           </a:xfrm>
           <a:prstGeom prst="roundRect">
             <a:avLst/>
@@ -6198,39 +6415,38 @@
           <a:lstStyle/>
           <a:p>
             <a:pPr algn="ctr">
-              <a:defRPr sz="1000" b="1">
-                <a:solidFill>
-                  <a:srgbClr val="2563EB"/>
-                </a:solidFill>
-              </a:defRPr>
-            </a:pPr>
-            <a:r>
-              <a:t>STAGE 2</a:t>
-            </a:r>
-          </a:p>
-          <a:p>
-            <a:pPr>
-              <a:defRPr sz="1400" b="1">
-                <a:solidFill>
-                  <a:srgbClr val="0F172A"/>
-                </a:solidFill>
-              </a:defRPr>
-            </a:pPr>
-            <a:r>
-              <a:t>Subspace Learning</a:t>
-            </a:r>
-          </a:p>
-          <a:p/>
+              <a:defRPr sz="1500" b="1">
+                <a:solidFill>
+                  <a:srgbClr val="F59E0B"/>
+                </a:solidFill>
+              </a:defRPr>
+            </a:pPr>
+            <a:r>
+              <a:t>2. The Average Face (Ψ)</a:t>
+            </a:r>
+          </a:p>
           <a:p>
             <a:pPr>
               <a:defRPr sz="1100">
                 <a:solidFill>
+                  <a:srgbClr val="94A3B8"/>
+                </a:solidFill>
+              </a:defRPr>
+            </a:pPr>
+            <a:r>
+              <a:t>Capturing the Shared Baseline Geometry</a:t>
+            </a:r>
+          </a:p>
+          <a:p>
+            <a:pPr>
+              <a:defRPr sz="1100">
+                <a:solidFill>
                   <a:srgbClr val="1E293B"/>
                 </a:solidFill>
               </a:defRPr>
             </a:pPr>
             <a:r>
-              <a:t>• Compute mean face Ψ</a:t>
+              <a:t>• Mathematical definition:</a:t>
             </a:r>
           </a:p>
           <a:p>
@@ -6242,7 +6458,7 @@
               </a:defRPr>
             </a:pPr>
             <a:r>
-              <a:t>• Mean-center: Φᵢ = Γᵢ - Ψ</a:t>
+              <a:t>    Ψ = (1 / M) Σ Γ_i   (for i = 1 to M)</a:t>
             </a:r>
           </a:p>
           <a:p>
@@ -6254,7 +6470,7 @@
               </a:defRPr>
             </a:pPr>
             <a:r>
-              <a:t>• Form matrix A = [Φ₁...Φ_M]</a:t>
+              <a:t>• Captures common structural features shared across all human subjects (eyes, nose, forehead placement).</a:t>
             </a:r>
           </a:p>
           <a:p>
@@ -6266,7 +6482,19 @@
               </a:defRPr>
             </a:pPr>
             <a:r>
-              <a:t>• Surrogate trick: L = Aᵀ A</a:t>
+              <a:t>• Visually appears as a smooth, blurry composite face.</a:t>
+            </a:r>
+          </a:p>
+          <a:p>
+            <a:pPr>
+              <a:defRPr sz="1100">
+                <a:solidFill>
+                  <a:srgbClr val="1E293B"/>
+                </a:solidFill>
+              </a:defRPr>
+            </a:pPr>
+            <a:r>
+              <a:t>• Serves as the origin of the centered face coordinate system.</a:t>
             </a:r>
           </a:p>
         </p:txBody>
@@ -6279,8 +6507,8 @@
         </p:nvSpPr>
         <p:spPr>
           <a:xfrm>
-            <a:off x="6181344" y="1371600"/>
-            <a:ext cx="2560320" cy="3931920"/>
+            <a:off x="8046720" y="1371600"/>
+            <a:ext cx="3383280" cy="4937760"/>
           </a:xfrm>
           <a:prstGeom prst="roundRect">
             <a:avLst/>
@@ -6313,39 +6541,38 @@
           <a:lstStyle/>
           <a:p>
             <a:pPr algn="ctr">
-              <a:defRPr sz="1000" b="1">
-                <a:solidFill>
-                  <a:srgbClr val="F59E0B"/>
-                </a:solidFill>
-              </a:defRPr>
-            </a:pPr>
-            <a:r>
-              <a:t>STAGE 3</a:t>
-            </a:r>
-          </a:p>
-          <a:p>
-            <a:pPr>
-              <a:defRPr sz="1400" b="1">
-                <a:solidFill>
-                  <a:srgbClr val="0F172A"/>
-                </a:solidFill>
-              </a:defRPr>
-            </a:pPr>
-            <a:r>
-              <a:t>Eigenface Basis</a:t>
-            </a:r>
-          </a:p>
-          <a:p/>
+              <a:defRPr sz="1500" b="1">
+                <a:solidFill>
+                  <a:srgbClr val="10B981"/>
+                </a:solidFill>
+              </a:defRPr>
+            </a:pPr>
+            <a:r>
+              <a:t>3. Mean-Centered Matrix (A)</a:t>
+            </a:r>
+          </a:p>
           <a:p>
             <a:pPr>
               <a:defRPr sz="1100">
                 <a:solidFill>
+                  <a:srgbClr val="94A3B8"/>
+                </a:solidFill>
+              </a:defRPr>
+            </a:pPr>
+            <a:r>
+              <a:t>Isolating Distinguishing Variations</a:t>
+            </a:r>
+          </a:p>
+          <a:p>
+            <a:pPr>
+              <a:defRPr sz="1100">
+                <a:solidFill>
                   <a:srgbClr val="1E293B"/>
                 </a:solidFill>
               </a:defRPr>
             </a:pPr>
             <a:r>
-              <a:t>• Solve L v_k = μ_k v_k</a:t>
+              <a:t>• Subtract the mean from each face:</a:t>
             </a:r>
           </a:p>
           <a:p>
@@ -6357,7 +6584,7 @@
               </a:defRPr>
             </a:pPr>
             <a:r>
-              <a:t>• Eigenfaces: u_k = A v_k / ||A v_k||</a:t>
+              <a:t>    Φ_i = Γ_i - Ψ</a:t>
             </a:r>
           </a:p>
           <a:p>
@@ -6369,7 +6596,7 @@
               </a:defRPr>
             </a:pPr>
             <a:r>
-              <a:t>• Retain top K components</a:t>
+              <a:t>• Removes common baseline; preserves only individual distinctiveness.</a:t>
             </a:r>
           </a:p>
           <a:p>
@@ -6381,76 +6608,9 @@
               </a:defRPr>
             </a:pPr>
             <a:r>
-              <a:t>• Basis matrix U = [u₁...u_K]</a:t>
-            </a:r>
-          </a:p>
-        </p:txBody>
-      </p:sp>
-      <p:sp>
-        <p:nvSpPr>
-          <p:cNvPr id="10" name="Rounded Rectangle 9"/>
-          <p:cNvSpPr/>
-          <p:nvPr/>
-        </p:nvSpPr>
-        <p:spPr>
-          <a:xfrm>
-            <a:off x="8906256" y="1371600"/>
-            <a:ext cx="2560320" cy="3931920"/>
-          </a:xfrm>
-          <a:prstGeom prst="roundRect">
-            <a:avLst/>
-          </a:prstGeom>
-          <a:solidFill>
-            <a:srgbClr val="FFFFFF"/>
-          </a:solidFill>
-          <a:ln w="12700">
-            <a:solidFill>
-              <a:srgbClr val="E2E8F0"/>
-            </a:solidFill>
-          </a:ln>
-        </p:spPr>
-        <p:style>
-          <a:lnRef idx="1">
-            <a:schemeClr val="accent1"/>
-          </a:lnRef>
-          <a:fillRef idx="3">
-            <a:schemeClr val="accent1"/>
-          </a:fillRef>
-          <a:effectRef idx="2">
-            <a:schemeClr val="accent1"/>
-          </a:effectRef>
-          <a:fontRef idx="minor">
-            <a:schemeClr val="lt1"/>
-          </a:fontRef>
-        </p:style>
-        <p:txBody>
-          <a:bodyPr rtlCol="0" anchor="ctr" wrap="square"/>
-          <a:lstStyle/>
-          <a:p>
-            <a:pPr algn="ctr">
-              <a:defRPr sz="1000" b="1">
-                <a:solidFill>
-                  <a:srgbClr val="10B981"/>
-                </a:solidFill>
-              </a:defRPr>
-            </a:pPr>
-            <a:r>
-              <a:t>STAGE 4</a:t>
-            </a:r>
-          </a:p>
-          <a:p>
-            <a:pPr>
-              <a:defRPr sz="1400" b="1">
-                <a:solidFill>
-                  <a:srgbClr val="0F172A"/>
-                </a:solidFill>
-              </a:defRPr>
-            </a:pPr>
-            <a:r>
-              <a:t>4-Way Inference</a:t>
-            </a:r>
-          </a:p>
-          <a:p/>
+              <a:t>• Stack centered vectors into matrix A:</a:t>
+            </a:r>
+          </a:p>
           <a:p>
             <a:pPr>
               <a:defRPr sz="1100">
@@ -6460,7 +6620,7 @@
               </a:defRPr>
             </a:pPr>
             <a:r>
-              <a:t>• Project probe: Ω = Uᵀ(Γ - Ψ)</a:t>
+              <a:t>    A = [Φ_1, Φ_2, ..., Φ_M] ∈ ℝ^(D × M)</a:t>
             </a:r>
           </a:p>
           <a:p>
@@ -6472,85 +6632,7 @@
               </a:defRPr>
             </a:pPr>
             <a:r>
-              <a:t>• Reconstruct: Γ̂ = Ψ + U Ω</a:t>
-            </a:r>
-          </a:p>
-          <a:p>
-            <a:pPr>
-              <a:defRPr sz="1100">
-                <a:solidFill>
-                  <a:srgbClr val="1E293B"/>
-                </a:solidFill>
-              </a:defRPr>
-            </a:pPr>
-            <a:r>
-              <a:t>• Measure DFFS (ε_d) &amp; DIFS (ε_c)</a:t>
-            </a:r>
-          </a:p>
-          <a:p>
-            <a:pPr>
-              <a:defRPr sz="1100">
-                <a:solidFill>
-                  <a:srgbClr val="1E293B"/>
-                </a:solidFill>
-              </a:defRPr>
-            </a:pPr>
-            <a:r>
-              <a:t>• 4-Way Decision Rule</a:t>
-            </a:r>
-          </a:p>
-        </p:txBody>
-      </p:sp>
-      <p:sp>
-        <p:nvSpPr>
-          <p:cNvPr id="11" name="Rounded Rectangle 10"/>
-          <p:cNvSpPr/>
-          <p:nvPr/>
-        </p:nvSpPr>
-        <p:spPr>
-          <a:xfrm>
-            <a:off x="731520" y="5486400"/>
-            <a:ext cx="10725912" cy="822960"/>
-          </a:xfrm>
-          <a:prstGeom prst="roundRect">
-            <a:avLst/>
-          </a:prstGeom>
-          <a:solidFill>
-            <a:srgbClr val="0F172A"/>
-          </a:solidFill>
-          <a:ln w="12700">
-            <a:solidFill>
-              <a:srgbClr val="E2E8F0"/>
-            </a:solidFill>
-          </a:ln>
-        </p:spPr>
-        <p:style>
-          <a:lnRef idx="1">
-            <a:schemeClr val="accent1"/>
-          </a:lnRef>
-          <a:fillRef idx="3">
-            <a:schemeClr val="accent1"/>
-          </a:fillRef>
-          <a:effectRef idx="2">
-            <a:schemeClr val="accent1"/>
-          </a:effectRef>
-          <a:fontRef idx="minor">
-            <a:schemeClr val="lt1"/>
-          </a:fontRef>
-        </p:style>
-        <p:txBody>
-          <a:bodyPr rtlCol="0" anchor="ctr"/>
-          <a:lstStyle/>
-          <a:p>
-            <a:pPr algn="ctr">
-              <a:defRPr sz="1200" b="1">
-                <a:solidFill>
-                  <a:srgbClr val="FFFFFF"/>
-                </a:solidFill>
-              </a:defRPr>
-            </a:pPr>
-            <a:r>
-              <a:t>Key Innovation: Pure linear algebra pipeline executed from scratch using NumPy with zero black-box dependencies.</a:t>
+              <a:t>• With D = 4,096 and M = 245, A is a 4,096 × 245 matrix.</a:t>
             </a:r>
           </a:p>
         </p:txBody>
@@ -6767,7 +6849,7 @@
               </a:defRPr>
             </a:pPr>
             <a:r>
-              <a:t>3. Mathematical Subspace Formulation &amp; Mean Centering</a:t>
+              <a:t>The Turk-Pentland Dimensionality Reduction Trick</a:t>
             </a:r>
           </a:p>
         </p:txBody>
@@ -6816,159 +6898,144 @@
             <a:pPr algn="ctr">
               <a:defRPr sz="1600" b="1">
                 <a:solidFill>
-                  <a:srgbClr val="2563EB"/>
-                </a:solidFill>
-              </a:defRPr>
-            </a:pPr>
-            <a:r>
-              <a:t>Vectorization &amp; Data Matrix Formulation</a:t>
-            </a:r>
-          </a:p>
-          <a:p>
-            <a:pPr>
-              <a:defRPr sz="1150">
+                  <a:srgbClr val="E11D48"/>
+                </a:solidFill>
+              </a:defRPr>
+            </a:pPr>
+            <a:r>
+              <a:t>The Computational Roadblock</a:t>
+            </a:r>
+          </a:p>
+          <a:p>
+            <a:pPr>
+              <a:defRPr sz="1200">
+                <a:solidFill>
+                  <a:srgbClr val="94A3B8"/>
+                </a:solidFill>
+              </a:defRPr>
+            </a:pPr>
+            <a:r>
+              <a:t>Full Covariance Matrix: C = (1/M) A A^T</a:t>
+            </a:r>
+          </a:p>
+          <a:p>
+            <a:pPr>
+              <a:defRPr sz="1150" b="1">
+                <a:solidFill>
+                  <a:srgbClr val="0F172A"/>
+                </a:solidFill>
+              </a:defRPr>
+            </a:pPr>
+            <a:r>
+              <a:t>• Dimensionality Crisis:</a:t>
+            </a:r>
+          </a:p>
+          <a:p>
+            <a:pPr>
+              <a:defRPr sz="1050">
                 <a:solidFill>
                   <a:srgbClr val="1E293B"/>
                 </a:solidFill>
               </a:defRPr>
             </a:pPr>
             <a:r>
-              <a:t>• Image Vectorization: An image I(x, y) of size N × N = 64 × 64 is flattened row-wise into a high-dimensional vector:</a:t>
-            </a:r>
-          </a:p>
-          <a:p>
-            <a:pPr>
-              <a:defRPr sz="1150">
+              <a:t>  A is 4,096 × 245. Thus, C = A A^T has dimensions 4,096 × 4,096.</a:t>
+            </a:r>
+          </a:p>
+          <a:p>
+            <a:pPr>
+              <a:defRPr sz="1150" b="1">
+                <a:solidFill>
+                  <a:srgbClr val="0F172A"/>
+                </a:solidFill>
+              </a:defRPr>
+            </a:pPr>
+            <a:r>
+              <a:t>• Massive Matrix Size:</a:t>
+            </a:r>
+          </a:p>
+          <a:p>
+            <a:pPr>
+              <a:defRPr sz="1050">
                 <a:solidFill>
                   <a:srgbClr val="1E293B"/>
                 </a:solidFill>
               </a:defRPr>
             </a:pPr>
             <a:r>
-              <a:t>      Γᵢ ∈ ℝᴰ,   where D = 64 × 64 = 4096</a:t>
-            </a:r>
-          </a:p>
-          <a:p>
-            <a:pPr>
-              <a:defRPr sz="1150">
+              <a:t>  Contains 4,096² = 16,777,216 floating-point values (~134 MB memory footprint).</a:t>
+            </a:r>
+          </a:p>
+          <a:p>
+            <a:pPr>
+              <a:defRPr sz="1150" b="1">
+                <a:solidFill>
+                  <a:srgbClr val="0F172A"/>
+                </a:solidFill>
+              </a:defRPr>
+            </a:pPr>
+            <a:r>
+              <a:t>• Cubic Complexity:</a:t>
+            </a:r>
+          </a:p>
+          <a:p>
+            <a:pPr>
+              <a:defRPr sz="1050">
                 <a:solidFill>
                   <a:srgbClr val="1E293B"/>
                 </a:solidFill>
               </a:defRPr>
             </a:pPr>
-          </a:p>
-          <a:p>
-            <a:pPr>
-              <a:defRPr sz="1150">
+            <a:r>
+              <a:t>  Computing eigenvectors of a 4,096 × 4,096 matrix requires O(D³) operations—intractable for real-time deployment.</a:t>
+            </a:r>
+          </a:p>
+          <a:p>
+            <a:pPr>
+              <a:defRPr sz="1150" b="1">
+                <a:solidFill>
+                  <a:srgbClr val="0F172A"/>
+                </a:solidFill>
+              </a:defRPr>
+            </a:pPr>
+            <a:r>
+              <a:t>• Rank Deficiency:</a:t>
+            </a:r>
+          </a:p>
+          <a:p>
+            <a:pPr>
+              <a:defRPr sz="1050">
                 <a:solidFill>
                   <a:srgbClr val="1E293B"/>
                 </a:solidFill>
               </a:defRPr>
             </a:pPr>
             <a:r>
-              <a:t>• Average Face Vector (Mean Face):</a:t>
-            </a:r>
-          </a:p>
-          <a:p>
-            <a:pPr>
-              <a:defRPr sz="1150">
+              <a:t>  Because we only have M = 245 sample images, the maximum rank of C is at most M - 1 = 244.</a:t>
+            </a:r>
+          </a:p>
+          <a:p>
+            <a:pPr>
+              <a:defRPr sz="1150" b="1">
+                <a:solidFill>
+                  <a:srgbClr val="0F172A"/>
+                </a:solidFill>
+              </a:defRPr>
+            </a:pPr>
+            <a:r>
+              <a:t>• Redundant Computation:</a:t>
+            </a:r>
+          </a:p>
+          <a:p>
+            <a:pPr>
+              <a:defRPr sz="1050">
                 <a:solidFill>
                   <a:srgbClr val="1E293B"/>
                 </a:solidFill>
               </a:defRPr>
             </a:pPr>
             <a:r>
-              <a:t>      Ψ = (1 / M) ∑_{i=1}^M Γᵢ</a:t>
-            </a:r>
-          </a:p>
-          <a:p>
-            <a:pPr>
-              <a:defRPr sz="1150">
-                <a:solidFill>
-                  <a:srgbClr val="1E293B"/>
-                </a:solidFill>
-              </a:defRPr>
-            </a:pPr>
-            <a:r>
-              <a:t>  Represents the shared baseline template common to all human faces in the gallery.</a:t>
-            </a:r>
-          </a:p>
-          <a:p>
-            <a:pPr>
-              <a:defRPr sz="1150">
-                <a:solidFill>
-                  <a:srgbClr val="1E293B"/>
-                </a:solidFill>
-              </a:defRPr>
-            </a:pPr>
-          </a:p>
-          <a:p>
-            <a:pPr>
-              <a:defRPr sz="1150">
-                <a:solidFill>
-                  <a:srgbClr val="1E293B"/>
-                </a:solidFill>
-              </a:defRPr>
-            </a:pPr>
-            <a:r>
-              <a:t>• Mean-Centered Difference Vectors:</a:t>
-            </a:r>
-          </a:p>
-          <a:p>
-            <a:pPr>
-              <a:defRPr sz="1150">
-                <a:solidFill>
-                  <a:srgbClr val="1E293B"/>
-                </a:solidFill>
-              </a:defRPr>
-            </a:pPr>
-            <a:r>
-              <a:t>      Φᵢ = Γᵢ - Ψ</a:t>
-            </a:r>
-          </a:p>
-          <a:p>
-            <a:pPr>
-              <a:defRPr sz="1150">
-                <a:solidFill>
-                  <a:srgbClr val="1E293B"/>
-                </a:solidFill>
-              </a:defRPr>
-            </a:pPr>
-            <a:r>
-              <a:t>  Centers the distribution at origin, isolating subject-specific variations.</a:t>
-            </a:r>
-          </a:p>
-          <a:p>
-            <a:pPr>
-              <a:defRPr sz="1150">
-                <a:solidFill>
-                  <a:srgbClr val="1E293B"/>
-                </a:solidFill>
-              </a:defRPr>
-            </a:pPr>
-          </a:p>
-          <a:p>
-            <a:pPr>
-              <a:defRPr sz="1150">
-                <a:solidFill>
-                  <a:srgbClr val="1E293B"/>
-                </a:solidFill>
-              </a:defRPr>
-            </a:pPr>
-            <a:r>
-              <a:t>• Data Matrix Formulation:</a:t>
-            </a:r>
-          </a:p>
-          <a:p>
-            <a:pPr>
-              <a:defRPr sz="1150">
-                <a:solidFill>
-                  <a:srgbClr val="1E293B"/>
-                </a:solidFill>
-              </a:defRPr>
-            </a:pPr>
-            <a:r>
-              <a:t>      A = [Φ₁, Φ₂, ..., Φ_M] ∈ ℝ^{D × M}  (4096 × 245)</a:t>
+              <a:t>  Over 3,850 of the 4,096 eigenvalues are exactly zero! Direct calculation computes thousands of meaningless zeros.</a:t>
             </a:r>
           </a:p>
         </p:txBody>
@@ -7017,126 +7084,172 @@
             <a:pPr algn="ctr">
               <a:defRPr sz="1600" b="1">
                 <a:solidFill>
-                  <a:srgbClr val="F59E0B"/>
-                </a:solidFill>
-              </a:defRPr>
-            </a:pPr>
-            <a:r>
-              <a:t>Why Mean Centering is Essential</a:t>
+                  <a:srgbClr val="10B981"/>
+                </a:solidFill>
+              </a:defRPr>
+            </a:pPr>
+            <a:r>
+              <a:t>The Turk-Pentland Algebraic Duality</a:t>
             </a:r>
           </a:p>
           <a:p>
             <a:pPr>
               <a:defRPr sz="1200">
                 <a:solidFill>
+                  <a:srgbClr val="94A3B8"/>
+                </a:solidFill>
+              </a:defRPr>
+            </a:pPr>
+            <a:r>
+              <a:t>Surrogate Matrix: L = A^T A (279.5× Smaller)</a:t>
+            </a:r>
+          </a:p>
+          <a:p>
+            <a:pPr>
+              <a:defRPr sz="1150" b="1">
+                <a:solidFill>
+                  <a:srgbClr val="0F172A"/>
+                </a:solidFill>
+              </a:defRPr>
+            </a:pPr>
+            <a:r>
+              <a:t>• 1. Compute Surrogate Matrix L:</a:t>
+            </a:r>
+          </a:p>
+          <a:p>
+            <a:pPr>
+              <a:defRPr sz="1050">
+                <a:solidFill>
                   <a:srgbClr val="1E293B"/>
                 </a:solidFill>
               </a:defRPr>
             </a:pPr>
             <a:r>
-              <a:t>1. Removes Non-Informative Baseline:</a:t>
-            </a:r>
-          </a:p>
-          <a:p>
-            <a:pPr>
-              <a:defRPr sz="1200">
+              <a:t>  L = A^T A of size 245 × 245 (only 60,025 elements).</a:t>
+            </a:r>
+          </a:p>
+          <a:p>
+            <a:pPr>
+              <a:defRPr sz="1150" b="1">
+                <a:solidFill>
+                  <a:srgbClr val="0F172A"/>
+                </a:solidFill>
+              </a:defRPr>
+            </a:pPr>
+            <a:r>
+              <a:t>• 2. Solve Small Eigenproblem:</a:t>
+            </a:r>
+          </a:p>
+          <a:p>
+            <a:pPr>
+              <a:defRPr sz="1050">
                 <a:solidFill>
                   <a:srgbClr val="1E293B"/>
                 </a:solidFill>
               </a:defRPr>
             </a:pPr>
             <a:r>
-              <a:t>   Without subtracting Ψ, the 1st principal component would simply point towards the center of mass of face intensities rather than capturing facial distinctions.</a:t>
-            </a:r>
-          </a:p>
-          <a:p>
-            <a:pPr>
-              <a:defRPr sz="1200">
+              <a:t>  Let v_k be an eigenvector of L with eigenvalue μ_k:</a:t>
+            </a:r>
+            <a:br/>
+            <a:r>
+              <a:t>    A^T A v_k = μ_k v_k</a:t>
+            </a:r>
+          </a:p>
+          <a:p>
+            <a:pPr>
+              <a:defRPr sz="1150" b="1">
+                <a:solidFill>
+                  <a:srgbClr val="0F172A"/>
+                </a:solidFill>
+              </a:defRPr>
+            </a:pPr>
+            <a:r>
+              <a:t>• 3. Pre-multiply Both Sides by A:</a:t>
+            </a:r>
+          </a:p>
+          <a:p>
+            <a:pPr>
+              <a:defRPr sz="1050">
                 <a:solidFill>
                   <a:srgbClr val="1E293B"/>
                 </a:solidFill>
               </a:defRPr>
             </a:pPr>
-          </a:p>
-          <a:p>
-            <a:pPr>
-              <a:defRPr sz="1200">
+            <a:r>
+              <a:t>      A (A^T A v_k) = A (μ_k v_k)</a:t>
+            </a:r>
+          </a:p>
+          <a:p>
+            <a:pPr>
+              <a:defRPr sz="1150" b="1">
+                <a:solidFill>
+                  <a:srgbClr val="0F172A"/>
+                </a:solidFill>
+              </a:defRPr>
+            </a:pPr>
+            <a:r>
+              <a:t>• 4. Re-associate Parentheses:</a:t>
+            </a:r>
+          </a:p>
+          <a:p>
+            <a:pPr>
+              <a:defRPr sz="1050">
                 <a:solidFill>
                   <a:srgbClr val="1E293B"/>
                 </a:solidFill>
               </a:defRPr>
             </a:pPr>
             <a:r>
-              <a:t>2. Centers the Covariance Subspace:</a:t>
-            </a:r>
-          </a:p>
-          <a:p>
-            <a:pPr>
-              <a:defRPr sz="1200">
+              <a:t>      (A A^T) (A v_k) = μ_k (A v_k)</a:t>
+            </a:r>
+          </a:p>
+          <a:p>
+            <a:pPr>
+              <a:defRPr sz="1150" b="1">
+                <a:solidFill>
+                  <a:srgbClr val="0F172A"/>
+                </a:solidFill>
+              </a:defRPr>
+            </a:pPr>
+            <a:r>
+              <a:t>• 5. Exact Equivalence Established:</a:t>
+            </a:r>
+          </a:p>
+          <a:p>
+            <a:pPr>
+              <a:defRPr sz="1050">
                 <a:solidFill>
                   <a:srgbClr val="1E293B"/>
                 </a:solidFill>
               </a:defRPr>
             </a:pPr>
             <a:r>
-              <a:t>   The sample covariance matrix requires zero-mean variables:</a:t>
-            </a:r>
-          </a:p>
-          <a:p>
-            <a:pPr>
-              <a:defRPr sz="1200">
+              <a:t>  The vector u_k = A v_k is directly an eigenvector of the full covariance matrix C = A A^T!</a:t>
+            </a:r>
+          </a:p>
+          <a:p>
+            <a:pPr>
+              <a:defRPr sz="1150" b="1">
+                <a:solidFill>
+                  <a:srgbClr val="0F172A"/>
+                </a:solidFill>
+              </a:defRPr>
+            </a:pPr>
+            <a:r>
+              <a:t>• 6. Orthonormalization:</a:t>
+            </a:r>
+          </a:p>
+          <a:p>
+            <a:pPr>
+              <a:defRPr sz="1050">
                 <a:solidFill>
                   <a:srgbClr val="1E293B"/>
                 </a:solidFill>
               </a:defRPr>
             </a:pPr>
             <a:r>
-              <a:t>      C = (1 / M) ∑_{i=1}^M Φᵢ Φᵢᵀ = (1 / M) A Aᵀ</a:t>
-            </a:r>
-          </a:p>
-          <a:p>
-            <a:pPr>
-              <a:defRPr sz="1200">
-                <a:solidFill>
-                  <a:srgbClr val="1E293B"/>
-                </a:solidFill>
-              </a:defRPr>
-            </a:pPr>
-          </a:p>
-          <a:p>
-            <a:pPr>
-              <a:defRPr sz="1200">
-                <a:solidFill>
-                  <a:srgbClr val="1E293B"/>
-                </a:solidFill>
-              </a:defRPr>
-            </a:pPr>
-            <a:r>
-              <a:t>3. Interpretable Linear Combinations:</a:t>
-            </a:r>
-          </a:p>
-          <a:p>
-            <a:pPr>
-              <a:defRPr sz="1200">
-                <a:solidFill>
-                  <a:srgbClr val="1E293B"/>
-                </a:solidFill>
-              </a:defRPr>
-            </a:pPr>
-            <a:r>
-              <a:t>   Every face can now be represented as the common template plus a weighted combination of variation patterns:</a:t>
-            </a:r>
-          </a:p>
-          <a:p>
-            <a:pPr>
-              <a:defRPr sz="1200">
-                <a:solidFill>
-                  <a:srgbClr val="1E293B"/>
-                </a:solidFill>
-              </a:defRPr>
-            </a:pPr>
-            <a:r>
-              <a:t>      Γ ≈ Ψ + ∑_{k=1}^K ω_k u_k</a:t>
+              <a:t>  Normalize to unit length: u_k = (A v_k) / ||A v_k||₂.</a:t>
             </a:r>
           </a:p>
         </p:txBody>
@@ -7353,7 +7466,7 @@
               </a:defRPr>
             </a:pPr>
             <a:r>
-              <a:t>4. The Turk-Pentland Covariance Reduction Trick (Paper Core)</a:t>
+              <a:t>How Eigenfaces Are Formed: The Linear Combination Recipe</a:t>
             </a:r>
           </a:p>
         </p:txBody>
@@ -7367,7 +7480,7 @@
         <p:spPr>
           <a:xfrm>
             <a:off x="731520" y="1371600"/>
-            <a:ext cx="5120640" cy="2286000"/>
+            <a:ext cx="5120640" cy="4937760"/>
           </a:xfrm>
           <a:prstGeom prst="roundRect">
             <a:avLst/>
@@ -7402,72 +7515,104 @@
             <a:pPr algn="ctr">
               <a:defRPr sz="1500" b="1">
                 <a:solidFill>
-                  <a:srgbClr val="E11D48"/>
-                </a:solidFill>
-              </a:defRPr>
-            </a:pPr>
-            <a:r>
-              <a:t>The Intractable Dimensionality Problem</a:t>
-            </a:r>
-          </a:p>
-          <a:p>
-            <a:pPr>
-              <a:defRPr sz="1100">
+                  <a:srgbClr val="2563EB"/>
+                </a:solidFill>
+              </a:defRPr>
+            </a:pPr>
+            <a:r>
+              <a:t>1. Transforming Small Vectors Into Faces</a:t>
+            </a:r>
+          </a:p>
+          <a:p>
+            <a:pPr>
+              <a:defRPr sz="1200">
+                <a:solidFill>
+                  <a:srgbClr val="94A3B8"/>
+                </a:solidFill>
+              </a:defRPr>
+            </a:pPr>
+            <a:r>
+              <a:t>Mathematical Recipe: u_k = A · v_k</a:t>
+            </a:r>
+          </a:p>
+          <a:p>
+            <a:pPr>
+              <a:defRPr sz="1150" b="1">
+                <a:solidFill>
+                  <a:srgbClr val="0F172A"/>
+                </a:solidFill>
+              </a:defRPr>
+            </a:pPr>
+            <a:r>
+              <a:t>• The Eigenvector v_k as Blending Weights:</a:t>
+            </a:r>
+          </a:p>
+          <a:p>
+            <a:pPr>
+              <a:defRPr sz="1050">
                 <a:solidFill>
                   <a:srgbClr val="1E293B"/>
                 </a:solidFill>
               </a:defRPr>
             </a:pPr>
             <a:r>
-              <a:t>• Full Covariance Matrix: C = (1/M) A Aᵀ</a:t>
-            </a:r>
-          </a:p>
-          <a:p>
-            <a:pPr>
-              <a:defRPr sz="1100">
+              <a:t>  The small eigenvector v_k = [c₁, c₂, ..., c_M]^T contains M scalar numbers (one per training face). These numbers serve as mixing coefficients.</a:t>
+            </a:r>
+          </a:p>
+          <a:p>
+            <a:pPr>
+              <a:defRPr sz="1150" b="1">
+                <a:solidFill>
+                  <a:srgbClr val="0F172A"/>
+                </a:solidFill>
+              </a:defRPr>
+            </a:pPr>
+            <a:r>
+              <a:t>• Linear Combination of All Training Faces:</a:t>
+            </a:r>
+          </a:p>
+          <a:p>
+            <a:pPr>
+              <a:defRPr sz="1050">
                 <a:solidFill>
                   <a:srgbClr val="1E293B"/>
                 </a:solidFill>
               </a:defRPr>
             </a:pPr>
             <a:r>
-              <a:t>• Size: D × D = 4096 × 4096 = 16,777,216 entries (16.7 Million floats!)</a:t>
-            </a:r>
-          </a:p>
-          <a:p>
-            <a:pPr>
-              <a:defRPr sz="1100">
+              <a:t>  Multiplying A by v_k produces:</a:t>
+            </a:r>
+            <a:br/>
+            <a:r>
+              <a:t>    u_k = Σ(i=1 to M) c_i · Φ_i</a:t>
+            </a:r>
+            <a:br/>
+            <a:r>
+              <a:t>In plain words: Eigenface k is formed by taking c₁ of Face 1, adding c₂ of Face 2, subtracting c₃ of Face 3, and so on across all 245 faces.</a:t>
+            </a:r>
+          </a:p>
+          <a:p>
+            <a:pPr>
+              <a:defRPr sz="1150" b="1">
+                <a:solidFill>
+                  <a:srgbClr val="0F172A"/>
+                </a:solidFill>
+              </a:defRPr>
+            </a:pPr>
+            <a:r>
+              <a:t>• Why Do They Look Like 'Ghost' Faces?:</a:t>
+            </a:r>
+          </a:p>
+          <a:p>
+            <a:pPr>
+              <a:defRPr sz="1050">
                 <a:solidFill>
                   <a:srgbClr val="1E293B"/>
                 </a:solidFill>
               </a:defRPr>
             </a:pPr>
             <a:r>
-              <a:t>• Eigendecomposition complexity: O(D³) ≈ 6.87 × 10¹⁰ operations.</a:t>
-            </a:r>
-          </a:p>
-          <a:p>
-            <a:pPr>
-              <a:defRPr sz="1100">
-                <a:solidFill>
-                  <a:srgbClr val="1E293B"/>
-                </a:solidFill>
-              </a:defRPr>
-            </a:pPr>
-            <a:r>
-              <a:t>• But we only have M = 245 training images! Max rank is M - 1 = 244.</a:t>
-            </a:r>
-          </a:p>
-          <a:p>
-            <a:pPr>
-              <a:defRPr sz="1100">
-                <a:solidFill>
-                  <a:srgbClr val="1E293B"/>
-                </a:solidFill>
-              </a:defRPr>
-            </a:pPr>
-            <a:r>
-              <a:t>• 4096 - 245 = 3851 eigenvalues are exactly zero (pure redundant noise).</a:t>
+              <a:t>  Because every Eigenface is literally a composite blending of 245 centered human faces. Adding and subtracting centered images reveals shared anatomical contours and lighting gradients while canceling individual skin textures.</a:t>
             </a:r>
           </a:p>
         </p:txBody>
@@ -7480,8 +7625,8 @@
         </p:nvSpPr>
         <p:spPr>
           <a:xfrm>
-            <a:off x="731520" y="3840480"/>
-            <a:ext cx="5120640" cy="2468880"/>
+            <a:off x="6217920" y="1371600"/>
+            <a:ext cx="5212080" cy="4937760"/>
           </a:xfrm>
           <a:prstGeom prst="roundRect">
             <a:avLst/>
@@ -7521,310 +7666,147 @@
               </a:defRPr>
             </a:pPr>
             <a:r>
-              <a:t>The Turk-Pentland Surrogate Matrix L</a:t>
-            </a:r>
-          </a:p>
-          <a:p>
-            <a:pPr>
-              <a:defRPr sz="1100">
+              <a:t>2. Ordering by Variance &amp; Feature Hierarchy</a:t>
+            </a:r>
+          </a:p>
+          <a:p>
+            <a:pPr>
+              <a:defRPr sz="1200">
+                <a:solidFill>
+                  <a:srgbClr val="94A3B8"/>
+                </a:solidFill>
+              </a:defRPr>
+            </a:pPr>
+            <a:r>
+              <a:t>Sorting Eigenfaces by Eigenvalues (λ₁ ≥ λ₂ ≥ ... ≥ λ_M)</a:t>
+            </a:r>
+          </a:p>
+          <a:p>
+            <a:pPr>
+              <a:defRPr sz="1150" b="1">
+                <a:solidFill>
+                  <a:srgbClr val="0F172A"/>
+                </a:solidFill>
+              </a:defRPr>
+            </a:pPr>
+            <a:r>
+              <a:t>• Unit Normalization:</a:t>
+            </a:r>
+          </a:p>
+          <a:p>
+            <a:pPr>
+              <a:defRPr sz="1050">
                 <a:solidFill>
                   <a:srgbClr val="1E293B"/>
                 </a:solidFill>
               </a:defRPr>
             </a:pPr>
             <a:r>
-              <a:t>• Compute surrogate matrix: L = Aᵀ A</a:t>
-            </a:r>
-          </a:p>
-          <a:p>
-            <a:pPr>
-              <a:defRPr sz="1100">
+              <a:t>  Each raw Eigenface is normalized to unit length:</a:t>
+            </a:r>
+            <a:br/>
+            <a:r>
+              <a:t>    u_k = u_k / ||u_k||₂</a:t>
+            </a:r>
+            <a:br/>
+            <a:r>
+              <a:t>Ensures all basis vectors form an orthonormal basis (u_i^T · u_j = 0 when i ≠ j).</a:t>
+            </a:r>
+          </a:p>
+          <a:p>
+            <a:pPr>
+              <a:defRPr sz="1150" b="1">
+                <a:solidFill>
+                  <a:srgbClr val="0F172A"/>
+                </a:solidFill>
+              </a:defRPr>
+            </a:pPr>
+            <a:r>
+              <a:t>• Eigenfaces 1 – 2 (Primary Illumination):</a:t>
+            </a:r>
+          </a:p>
+          <a:p>
+            <a:pPr>
+              <a:defRPr sz="1050">
                 <a:solidFill>
                   <a:srgbClr val="1E293B"/>
                 </a:solidFill>
               </a:defRPr>
             </a:pPr>
             <a:r>
-              <a:t>• Size: M × M = 245 × 245 = 60,025 entries (279.5× smaller!)</a:t>
-            </a:r>
-          </a:p>
-          <a:p>
-            <a:pPr>
-              <a:defRPr sz="1100">
+              <a:t>  Correspond to the largest eigenvalues. Capture the dominant global lighting directions (light from left vs. light from right).</a:t>
+            </a:r>
+          </a:p>
+          <a:p>
+            <a:pPr>
+              <a:defRPr sz="1150" b="1">
+                <a:solidFill>
+                  <a:srgbClr val="0F172A"/>
+                </a:solidFill>
+              </a:defRPr>
+            </a:pPr>
+            <a:r>
+              <a:t>• Eigenfaces 3 – 10 (Macro Facial Anatomy):</a:t>
+            </a:r>
+          </a:p>
+          <a:p>
+            <a:pPr>
+              <a:defRPr sz="1050">
                 <a:solidFill>
                   <a:srgbClr val="1E293B"/>
                 </a:solidFill>
               </a:defRPr>
             </a:pPr>
             <a:r>
-              <a:t>• Eigendecomposition complexity: O(M³) ≈ 1.47 × 10⁷ operations.</a:t>
-            </a:r>
-          </a:p>
-          <a:p>
-            <a:pPr>
-              <a:defRPr sz="1100">
+              <a:t>  Capture broad geometric variations: jawline width, forehead height, cheekbone structure, and hairline curvature.</a:t>
+            </a:r>
+          </a:p>
+          <a:p>
+            <a:pPr>
+              <a:defRPr sz="1150" b="1">
+                <a:solidFill>
+                  <a:srgbClr val="0F172A"/>
+                </a:solidFill>
+              </a:defRPr>
+            </a:pPr>
+            <a:r>
+              <a:t>• Eigenfaces 11 – 40 (Micro Facial Features):</a:t>
+            </a:r>
+          </a:p>
+          <a:p>
+            <a:pPr>
+              <a:defRPr sz="1050">
                 <a:solidFill>
                   <a:srgbClr val="1E293B"/>
                 </a:solidFill>
               </a:defRPr>
             </a:pPr>
             <a:r>
-              <a:t>• Speedup factor: &gt; 4,600× reduction in computation!</a:t>
-            </a:r>
-          </a:p>
-          <a:p>
-            <a:pPr>
-              <a:defRPr sz="1100">
+              <a:t>  Encode localized distinguishing traits: eye shapes, nose bridge contours, lip fullness, and eyebrows.</a:t>
+            </a:r>
+          </a:p>
+          <a:p>
+            <a:pPr>
+              <a:defRPr sz="1150" b="1">
+                <a:solidFill>
+                  <a:srgbClr val="0F172A"/>
+                </a:solidFill>
+              </a:defRPr>
+            </a:pPr>
+            <a:r>
+              <a:t>• Eigenfaces 41+ (Noise &amp; Redundancy):</a:t>
+            </a:r>
+          </a:p>
+          <a:p>
+            <a:pPr>
+              <a:defRPr sz="1050">
                 <a:solidFill>
                   <a:srgbClr val="1E293B"/>
                 </a:solidFill>
               </a:defRPr>
             </a:pPr>
             <a:r>
-              <a:t>• Can be solved in milliseconds on standard hardware.</a:t>
-            </a:r>
-          </a:p>
-        </p:txBody>
-      </p:sp>
-      <p:sp>
-        <p:nvSpPr>
-          <p:cNvPr id="9" name="Rounded Rectangle 8"/>
-          <p:cNvSpPr/>
-          <p:nvPr/>
-        </p:nvSpPr>
-        <p:spPr>
-          <a:xfrm>
-            <a:off x="6217920" y="1371600"/>
-            <a:ext cx="5212080" cy="4937760"/>
-          </a:xfrm>
-          <a:prstGeom prst="roundRect">
-            <a:avLst/>
-          </a:prstGeom>
-          <a:solidFill>
-            <a:srgbClr val="0F172A"/>
-          </a:solidFill>
-          <a:ln w="12700">
-            <a:solidFill>
-              <a:srgbClr val="2563EB"/>
-            </a:solidFill>
-          </a:ln>
-        </p:spPr>
-        <p:style>
-          <a:lnRef idx="1">
-            <a:schemeClr val="accent1"/>
-          </a:lnRef>
-          <a:fillRef idx="3">
-            <a:schemeClr val="accent1"/>
-          </a:fillRef>
-          <a:effectRef idx="2">
-            <a:schemeClr val="accent1"/>
-          </a:effectRef>
-          <a:fontRef idx="minor">
-            <a:schemeClr val="lt1"/>
-          </a:fontRef>
-        </p:style>
-        <p:txBody>
-          <a:bodyPr rtlCol="0" anchor="ctr" wrap="square"/>
-          <a:lstStyle/>
-          <a:p>
-            <a:pPr algn="ctr">
-              <a:defRPr sz="1600" b="1">
-                <a:solidFill>
-                  <a:srgbClr val="F59E0B"/>
-                </a:solidFill>
-              </a:defRPr>
-            </a:pPr>
-            <a:r>
-              <a:t>Mathematical Proof of Equivalence</a:t>
-            </a:r>
-          </a:p>
-          <a:p>
-            <a:pPr>
-              <a:defRPr sz="1100">
-                <a:solidFill>
-                  <a:srgbClr val="FFFFFF"/>
-                </a:solidFill>
-              </a:defRPr>
-            </a:pPr>
-            <a:r>
-              <a:t>1. Let v_k be an eigenvector of L = Aᵀ A with eigenvalue μ_k:</a:t>
-            </a:r>
-          </a:p>
-          <a:p>
-            <a:pPr>
-              <a:defRPr sz="1100">
-                <a:solidFill>
-                  <a:srgbClr val="FFFFFF"/>
-                </a:solidFill>
-              </a:defRPr>
-            </a:pPr>
-            <a:r>
-              <a:t>       Aᵀ A v_k = μ_k v_k</a:t>
-            </a:r>
-          </a:p>
-          <a:p>
-            <a:pPr>
-              <a:defRPr sz="1100">
-                <a:solidFill>
-                  <a:srgbClr val="FFFFFF"/>
-                </a:solidFill>
-              </a:defRPr>
-            </a:pPr>
-          </a:p>
-          <a:p>
-            <a:pPr>
-              <a:defRPr sz="1100">
-                <a:solidFill>
-                  <a:srgbClr val="FFFFFF"/>
-                </a:solidFill>
-              </a:defRPr>
-            </a:pPr>
-            <a:r>
-              <a:t>2. Multiply both sides from the left by matrix A:</a:t>
-            </a:r>
-          </a:p>
-          <a:p>
-            <a:pPr>
-              <a:defRPr sz="1100">
-                <a:solidFill>
-                  <a:srgbClr val="FFFFFF"/>
-                </a:solidFill>
-              </a:defRPr>
-            </a:pPr>
-            <a:r>
-              <a:t>       A (Aᵀ A v_k) = A (μ_k v_k)</a:t>
-            </a:r>
-          </a:p>
-          <a:p>
-            <a:pPr>
-              <a:defRPr sz="1100">
-                <a:solidFill>
-                  <a:srgbClr val="FFFFFF"/>
-                </a:solidFill>
-              </a:defRPr>
-            </a:pPr>
-          </a:p>
-          <a:p>
-            <a:pPr>
-              <a:defRPr sz="1100">
-                <a:solidFill>
-                  <a:srgbClr val="FFFFFF"/>
-                </a:solidFill>
-              </a:defRPr>
-            </a:pPr>
-            <a:r>
-              <a:t>3. Regroup terms using matrix associativity:</a:t>
-            </a:r>
-          </a:p>
-          <a:p>
-            <a:pPr>
-              <a:defRPr sz="1100">
-                <a:solidFill>
-                  <a:srgbClr val="FFFFFF"/>
-                </a:solidFill>
-              </a:defRPr>
-            </a:pPr>
-            <a:r>
-              <a:t>       (A Aᵀ) (A v_k) = μ_k (A v_k)</a:t>
-            </a:r>
-          </a:p>
-          <a:p>
-            <a:pPr>
-              <a:defRPr sz="1100">
-                <a:solidFill>
-                  <a:srgbClr val="FFFFFF"/>
-                </a:solidFill>
-              </a:defRPr>
-            </a:pPr>
-          </a:p>
-          <a:p>
-            <a:pPr>
-              <a:defRPr sz="1100">
-                <a:solidFill>
-                  <a:srgbClr val="FFFFFF"/>
-                </a:solidFill>
-              </a:defRPr>
-            </a:pPr>
-            <a:r>
-              <a:t>4. Recognize the form of the eigenvalue equation:</a:t>
-            </a:r>
-          </a:p>
-          <a:p>
-            <a:pPr>
-              <a:defRPr sz="1100">
-                <a:solidFill>
-                  <a:srgbClr val="FFFFFF"/>
-                </a:solidFill>
-              </a:defRPr>
-            </a:pPr>
-            <a:r>
-              <a:t>       Let  u_k = A v_k</a:t>
-            </a:r>
-          </a:p>
-          <a:p>
-            <a:pPr>
-              <a:defRPr sz="1100">
-                <a:solidFill>
-                  <a:srgbClr val="FFFFFF"/>
-                </a:solidFill>
-              </a:defRPr>
-            </a:pPr>
-            <a:r>
-              <a:t>       Then:  (A Aᵀ) u_k = μ_k u_k</a:t>
-            </a:r>
-          </a:p>
-          <a:p>
-            <a:pPr>
-              <a:defRPr sz="1100">
-                <a:solidFill>
-                  <a:srgbClr val="FFFFFF"/>
-                </a:solidFill>
-              </a:defRPr>
-            </a:pPr>
-          </a:p>
-          <a:p>
-            <a:pPr>
-              <a:defRPr sz="1100">
-                <a:solidFill>
-                  <a:srgbClr val="FFFFFF"/>
-                </a:solidFill>
-              </a:defRPr>
-            </a:pPr>
-            <a:r>
-              <a:t>5. Normalization to Unit Orthonormal Basis:</a:t>
-            </a:r>
-          </a:p>
-          <a:p>
-            <a:pPr>
-              <a:defRPr sz="1100">
-                <a:solidFill>
-                  <a:srgbClr val="FFFFFF"/>
-                </a:solidFill>
-              </a:defRPr>
-            </a:pPr>
-            <a:r>
-              <a:t>       u_k = (A v_k) / ||A v_k||₂</a:t>
-            </a:r>
-          </a:p>
-          <a:p>
-            <a:pPr>
-              <a:defRPr sz="1100">
-                <a:solidFill>
-                  <a:srgbClr val="FFFFFF"/>
-                </a:solidFill>
-              </a:defRPr>
-            </a:pPr>
-          </a:p>
-          <a:p>
-            <a:pPr>
-              <a:defRPr sz="1100">
-                <a:solidFill>
-                  <a:srgbClr val="FFFFFF"/>
-                </a:solidFill>
-              </a:defRPr>
-            </a:pPr>
-            <a:r>
-              <a:t>Conclusion: A v_k is an EXACT eigenvector of the full D × D covariance matrix A Aᵀ with the identical eigenvalue μ_k!</a:t>
+              <a:t>  Represent negligible variance, pixel quantization noise, or camera artifacts—safely discarded during dimensionality reduction.</a:t>
             </a:r>
           </a:p>
         </p:txBody>
@@ -8041,7 +8023,7 @@
               </a:defRPr>
             </a:pPr>
             <a:r>
-              <a:t>5. Eigenfaces Subspace &amp; Energy Spectrum</a:t>
+              <a:t>Eigenfaces Gallery &amp; Eigenvalue Spectrum Analysis</a:t>
             </a:r>
           </a:p>
         </p:txBody>
@@ -8062,17 +8044,91 @@
         </p:blipFill>
         <p:spPr>
           <a:xfrm>
-            <a:off x="731520" y="1371600"/>
-            <a:ext cx="5212080" cy="5678539"/>
+            <a:off x="731520" y="1325880"/>
+            <a:ext cx="5120640" cy="3840480"/>
           </a:xfrm>
           <a:prstGeom prst="rect">
             <a:avLst/>
           </a:prstGeom>
         </p:spPr>
       </p:pic>
+      <p:sp>
+        <p:nvSpPr>
+          <p:cNvPr id="8" name="Rounded Rectangle 7"/>
+          <p:cNvSpPr/>
+          <p:nvPr/>
+        </p:nvSpPr>
+        <p:spPr>
+          <a:xfrm>
+            <a:off x="731520" y="5257800"/>
+            <a:ext cx="5120640" cy="1188720"/>
+          </a:xfrm>
+          <a:prstGeom prst="roundRect">
+            <a:avLst/>
+          </a:prstGeom>
+          <a:solidFill>
+            <a:srgbClr val="FFFFFF"/>
+          </a:solidFill>
+          <a:ln w="12700">
+            <a:solidFill>
+              <a:srgbClr val="E2E8F0"/>
+            </a:solidFill>
+          </a:ln>
+        </p:spPr>
+        <p:style>
+          <a:lnRef idx="1">
+            <a:schemeClr val="accent1"/>
+          </a:lnRef>
+          <a:fillRef idx="3">
+            <a:schemeClr val="accent1"/>
+          </a:fillRef>
+          <a:effectRef idx="2">
+            <a:schemeClr val="accent1"/>
+          </a:effectRef>
+          <a:fontRef idx="minor">
+            <a:schemeClr val="lt1"/>
+          </a:fontRef>
+        </p:style>
+        <p:txBody>
+          <a:bodyPr rtlCol="0" anchor="ctr" wrap="square"/>
+          <a:lstStyle/>
+          <a:p>
+            <a:pPr algn="ctr">
+              <a:defRPr sz="1100" b="1">
+                <a:solidFill>
+                  <a:srgbClr val="2563EB"/>
+                </a:solidFill>
+              </a:defRPr>
+            </a:pPr>
+            <a:r>
+              <a:t>Visual Anatomy of Top 16 Eigenfaces</a:t>
+            </a:r>
+          </a:p>
+          <a:p>
+            <a:pPr>
+              <a:defRPr sz="950">
+                <a:solidFill>
+                  <a:srgbClr val="1E293B"/>
+                </a:solidFill>
+              </a:defRPr>
+            </a:pPr>
+            <a:r>
+              <a:t>• The first 4 eigenfaces show strong left/right and top/bottom lighting gradients.</a:t>
+            </a:r>
+            <a:br/>
+            <a:r>
+              <a:t>• Components 5-16 reveal distinct eye socket hollows, nose bridges, and jaw shapes.</a:t>
+            </a:r>
+            <a:br/>
+            <a:r>
+              <a:t>• Each image is an orthonormal basis vector spanning the face subspace.</a:t>
+            </a:r>
+          </a:p>
+        </p:txBody>
+      </p:sp>
       <p:pic>
         <p:nvPicPr>
-          <p:cNvPr id="8" name="Picture 7" descr="02_eigenvalue_scree_plot.png"/>
+          <p:cNvPr id="9" name="Picture 8" descr="02_eigenvalue_scree_plot.png"/>
           <p:cNvPicPr>
             <a:picLocks noChangeAspect="1"/>
           </p:cNvPicPr>
@@ -8086,8 +8142,8 @@
         </p:blipFill>
         <p:spPr>
           <a:xfrm>
-            <a:off x="6217920" y="1371600"/>
-            <a:ext cx="5212080" cy="1780524"/>
+            <a:off x="6217920" y="1325880"/>
+            <a:ext cx="5212080" cy="3840480"/>
           </a:xfrm>
           <a:prstGeom prst="rect">
             <a:avLst/>
@@ -8096,14 +8152,14 @@
       </p:pic>
       <p:sp>
         <p:nvSpPr>
-          <p:cNvPr id="9" name="Rounded Rectangle 8"/>
+          <p:cNvPr id="10" name="Rounded Rectangle 9"/>
           <p:cNvSpPr/>
           <p:nvPr/>
         </p:nvSpPr>
         <p:spPr>
           <a:xfrm>
-            <a:off x="731520" y="5394960"/>
-            <a:ext cx="10725912" cy="1005840"/>
+            <a:off x="6217920" y="5257800"/>
+            <a:ext cx="5212080" cy="1188720"/>
           </a:xfrm>
           <a:prstGeom prst="roundRect">
             <a:avLst/>
@@ -8138,32 +8194,32 @@
             <a:pPr algn="ctr">
               <a:defRPr sz="1100" b="1">
                 <a:solidFill>
-                  <a:srgbClr val="2563EB"/>
-                </a:solidFill>
-              </a:defRPr>
-            </a:pPr>
-            <a:r>
-              <a:t>Key Observations:</a:t>
-            </a:r>
-          </a:p>
-          <a:p>
-            <a:pPr>
-              <a:defRPr sz="1050">
+                  <a:srgbClr val="10B981"/>
+                </a:solidFill>
+              </a:defRPr>
+            </a:pPr>
+            <a:r>
+              <a:t>Eigenvalue Spectrum (Scree Analysis)</a:t>
+            </a:r>
+          </a:p>
+          <a:p>
+            <a:pPr>
+              <a:defRPr sz="950">
                 <a:solidFill>
                   <a:srgbClr val="1E293B"/>
                 </a:solidFill>
               </a:defRPr>
             </a:pPr>
             <a:r>
-              <a:t>• Top eigenfaces (u₁ - u₄) capture dominant global illumination gradients (left/right shading) and head silhouette.</a:t>
+              <a:t>• Rapid exponential drop in eigenvalue magnitude confirms high data redundancy.</a:t>
             </a:r>
             <a:br/>
             <a:r>
-              <a:t>• Middle eigenfaces (u₅ - u₁₆) capture facial micro-structures: eyes, nose bridge, mouth shape, and facial hair.</a:t>
+              <a:t>• First 10 components account for ~65% of total dataset variance.</a:t>
             </a:r>
             <a:br/>
             <a:r>
-              <a:t>• Scree analysis shows the top 30-50 components retain &gt;85% of total variance, reducing 4,096 dimensions to 40 numbers.</a:t>
+              <a:t>• Top 40 components capture &gt;88% of variance, discarding high-frequency noise.</a:t>
             </a:r>
           </a:p>
         </p:txBody>
@@ -8380,14 +8436,116 @@
               </a:defRPr>
             </a:pPr>
             <a:r>
-              <a:t>6. Projection &amp; Reconstruction Dynamics</a:t>
+              <a:t>How Projection &amp; Reconstruction Work in Practice</a:t>
+            </a:r>
+          </a:p>
+        </p:txBody>
+      </p:sp>
+      <p:sp>
+        <p:nvSpPr>
+          <p:cNvPr id="7" name="Rounded Rectangle 6"/>
+          <p:cNvSpPr/>
+          <p:nvPr/>
+        </p:nvSpPr>
+        <p:spPr>
+          <a:xfrm>
+            <a:off x="731520" y="1280160"/>
+            <a:ext cx="10725912" cy="1417320"/>
+          </a:xfrm>
+          <a:prstGeom prst="roundRect">
+            <a:avLst/>
+          </a:prstGeom>
+          <a:solidFill>
+            <a:srgbClr val="FFFFFF"/>
+          </a:solidFill>
+          <a:ln w="12700">
+            <a:solidFill>
+              <a:srgbClr val="E2E8F0"/>
+            </a:solidFill>
+          </a:ln>
+        </p:spPr>
+        <p:style>
+          <a:lnRef idx="1">
+            <a:schemeClr val="accent1"/>
+          </a:lnRef>
+          <a:fillRef idx="3">
+            <a:schemeClr val="accent1"/>
+          </a:fillRef>
+          <a:effectRef idx="2">
+            <a:schemeClr val="accent1"/>
+          </a:effectRef>
+          <a:fontRef idx="minor">
+            <a:schemeClr val="lt1"/>
+          </a:fontRef>
+        </p:style>
+        <p:txBody>
+          <a:bodyPr rtlCol="0" anchor="ctr" wrap="square"/>
+          <a:lstStyle/>
+          <a:p>
+            <a:pPr algn="ctr">
+              <a:defRPr sz="1300" b="1">
+                <a:solidFill>
+                  <a:srgbClr val="2563EB"/>
+                </a:solidFill>
+              </a:defRPr>
+            </a:pPr>
+            <a:r>
+              <a:t>1. Projection (Encoding) vs. 2. Reconstruction (Synthesis)</a:t>
+            </a:r>
+          </a:p>
+          <a:p>
+            <a:pPr>
+              <a:defRPr sz="1100" b="1">
+                <a:solidFill>
+                  <a:srgbClr val="0F172A"/>
+                </a:solidFill>
+              </a:defRPr>
+            </a:pPr>
+            <a:r>
+              <a:t>• How Projection Happens:  Ω = U_K^T · (Γ - Ψ) = [ω₁, ω₂, ..., ω_K]^T ∈ ℝ^K</a:t>
+            </a:r>
+          </a:p>
+          <a:p>
+            <a:pPr>
+              <a:defRPr sz="1000">
+                <a:solidFill>
+                  <a:srgbClr val="1E293B"/>
+                </a:solidFill>
+              </a:defRPr>
+            </a:pPr>
+            <a:r>
+              <a:t>  To encode a new face Γ: (1) Subtract Average Face Ψ. (2) Take dot product with each Eigenface u_k to compute weight ω_k = u_k^T · (Γ - Ψ). This compresses 4,096 raw pixels into a tiny vector of K scalar weights (e.g. K = 40).</a:t>
+            </a:r>
+          </a:p>
+          <a:p>
+            <a:pPr>
+              <a:defRPr sz="1100" b="1">
+                <a:solidFill>
+                  <a:srgbClr val="0F172A"/>
+                </a:solidFill>
+              </a:defRPr>
+            </a:pPr>
+            <a:r>
+              <a:t>• How Reconstruction Happens:  Γ̂ = Ψ + U_K · Ω = Ψ + Σ(k=1 to K) ω_k · u_k</a:t>
+            </a:r>
+          </a:p>
+          <a:p>
+            <a:pPr>
+              <a:defRPr sz="1000">
+                <a:solidFill>
+                  <a:srgbClr val="1E293B"/>
+                </a:solidFill>
+              </a:defRPr>
+            </a:pPr>
+            <a:r>
+              <a:t>  To rebuild the face: Start with Average Face Ψ, then add each Eigenface scaled by its weight. Layer by layer, the unique face reappears.</a:t>
             </a:r>
           </a:p>
         </p:txBody>
       </p:sp>
       <p:pic>
         <p:nvPicPr>
-          <p:cNvPr id="7" name="Picture 6" descr="03_face_reconstruction.png"/>
+          <p:cNvPr id="8" name="Picture 7" descr="03_face_reconstruction.png"/>
           <p:cNvPicPr>
             <a:picLocks noChangeAspect="1"/>
           </p:cNvPicPr>
@@ -8401,152 +8559,14 @@
         </p:blipFill>
         <p:spPr>
           <a:xfrm>
-            <a:off x="731520" y="1371600"/>
-            <a:ext cx="10725912" cy="2261442"/>
+            <a:off x="731520" y="2834640"/>
+            <a:ext cx="10725912" cy="3749039"/>
           </a:xfrm>
           <a:prstGeom prst="rect">
             <a:avLst/>
           </a:prstGeom>
         </p:spPr>
       </p:pic>
-      <p:sp>
-        <p:nvSpPr>
-          <p:cNvPr id="8" name="Rounded Rectangle 7"/>
-          <p:cNvSpPr/>
-          <p:nvPr/>
-        </p:nvSpPr>
-        <p:spPr>
-          <a:xfrm>
-            <a:off x="731520" y="4297680"/>
-            <a:ext cx="10725912" cy="2103120"/>
-          </a:xfrm>
-          <a:prstGeom prst="roundRect">
-            <a:avLst/>
-          </a:prstGeom>
-          <a:solidFill>
-            <a:srgbClr val="FFFFFF"/>
-          </a:solidFill>
-          <a:ln w="12700">
-            <a:solidFill>
-              <a:srgbClr val="E2E8F0"/>
-            </a:solidFill>
-          </a:ln>
-        </p:spPr>
-        <p:style>
-          <a:lnRef idx="1">
-            <a:schemeClr val="accent1"/>
-          </a:lnRef>
-          <a:fillRef idx="3">
-            <a:schemeClr val="accent1"/>
-          </a:fillRef>
-          <a:effectRef idx="2">
-            <a:schemeClr val="accent1"/>
-          </a:effectRef>
-          <a:fontRef idx="minor">
-            <a:schemeClr val="lt1"/>
-          </a:fontRef>
-        </p:style>
-        <p:txBody>
-          <a:bodyPr rtlCol="0" anchor="ctr" wrap="square"/>
-          <a:lstStyle/>
-          <a:p>
-            <a:pPr algn="ctr">
-              <a:defRPr sz="1300" b="1">
-                <a:solidFill>
-                  <a:srgbClr val="2563EB"/>
-                </a:solidFill>
-              </a:defRPr>
-            </a:pPr>
-            <a:r>
-              <a:t>Projection and Synthesis Mathematics:</a:t>
-            </a:r>
-          </a:p>
-          <a:p>
-            <a:pPr>
-              <a:defRPr sz="1100">
-                <a:solidFill>
-                  <a:srgbClr val="1E293B"/>
-                </a:solidFill>
-              </a:defRPr>
-            </a:pPr>
-            <a:r>
-              <a:t>• Orthogonal Projection onto Face Subspace:  Ω = Uᵀ (Γ - Ψ) = [ω₁, ω₂, ..., ω_K]ᵀ ∈ ℝᴷ</a:t>
-            </a:r>
-          </a:p>
-          <a:p>
-            <a:pPr>
-              <a:defRPr sz="1100">
-                <a:solidFill>
-                  <a:srgbClr val="1E293B"/>
-                </a:solidFill>
-              </a:defRPr>
-            </a:pPr>
-            <a:r>
-              <a:t>  Compresses a 4096-pixel image into a compact vector of K coordinates.</a:t>
-            </a:r>
-          </a:p>
-          <a:p>
-            <a:pPr>
-              <a:defRPr sz="1100">
-                <a:solidFill>
-                  <a:srgbClr val="1E293B"/>
-                </a:solidFill>
-              </a:defRPr>
-            </a:pPr>
-            <a:r>
-              <a:t>• Face Synthesis / Reconstruction:  Γ̂ = Ψ + U Ω = Ψ + ∑_{k=1}^K ω_k u_k</a:t>
-            </a:r>
-          </a:p>
-          <a:p>
-            <a:pPr>
-              <a:defRPr sz="1100">
-                <a:solidFill>
-                  <a:srgbClr val="1E293B"/>
-                </a:solidFill>
-              </a:defRPr>
-            </a:pPr>
-            <a:r>
-              <a:t>• Visual Hierarchy of Reconstruction:</a:t>
-            </a:r>
-          </a:p>
-          <a:p>
-            <a:pPr>
-              <a:defRPr sz="1100">
-                <a:solidFill>
-                  <a:srgbClr val="1E293B"/>
-                </a:solidFill>
-              </a:defRPr>
-            </a:pPr>
-            <a:r>
-              <a:t>  - K = 1 to 5: Coarse shape and overall lighting direction emerge.</a:t>
-            </a:r>
-          </a:p>
-          <a:p>
-            <a:pPr>
-              <a:defRPr sz="1100">
-                <a:solidFill>
-                  <a:srgbClr val="1E293B"/>
-                </a:solidFill>
-              </a:defRPr>
-            </a:pPr>
-            <a:r>
-              <a:t>  - K = 10 to 20: Eye sockets, nose contour, and mouth orientation become identifiable.</a:t>
-            </a:r>
-          </a:p>
-          <a:p>
-            <a:pPr>
-              <a:defRPr sz="1100">
-                <a:solidFill>
-                  <a:srgbClr val="1E293B"/>
-                </a:solidFill>
-              </a:defRPr>
-            </a:pPr>
-            <a:r>
-              <a:t>  - K = 30 to 50: Individual subject features become sharp and recognizable, achieving high fidelity.</a:t>
-            </a:r>
-          </a:p>
-        </p:txBody>
-      </p:sp>
     </p:spTree>
   </p:cSld>
   <p:clrMapOvr>
@@ -8759,14 +8779,200 @@
               </a:defRPr>
             </a:pPr>
             <a:r>
-              <a:t>7. The Complete 4-Way Decision Framework (Section 3.2)</a:t>
+              <a:t>How Classification Happens: The 4-Way Decision Rule</a:t>
+            </a:r>
+          </a:p>
+        </p:txBody>
+      </p:sp>
+      <p:sp>
+        <p:nvSpPr>
+          <p:cNvPr id="7" name="Rounded Rectangle 6"/>
+          <p:cNvSpPr/>
+          <p:nvPr/>
+        </p:nvSpPr>
+        <p:spPr>
+          <a:xfrm>
+            <a:off x="731520" y="1280160"/>
+            <a:ext cx="5120640" cy="5212080"/>
+          </a:xfrm>
+          <a:prstGeom prst="roundRect">
+            <a:avLst/>
+          </a:prstGeom>
+          <a:solidFill>
+            <a:srgbClr val="FFFFFF"/>
+          </a:solidFill>
+          <a:ln w="12700">
+            <a:solidFill>
+              <a:srgbClr val="E2E8F0"/>
+            </a:solidFill>
+          </a:ln>
+        </p:spPr>
+        <p:style>
+          <a:lnRef idx="1">
+            <a:schemeClr val="accent1"/>
+          </a:lnRef>
+          <a:fillRef idx="3">
+            <a:schemeClr val="accent1"/>
+          </a:fillRef>
+          <a:effectRef idx="2">
+            <a:schemeClr val="accent1"/>
+          </a:effectRef>
+          <a:fontRef idx="minor">
+            <a:schemeClr val="lt1"/>
+          </a:fontRef>
+        </p:style>
+        <p:txBody>
+          <a:bodyPr rtlCol="0" anchor="ctr" wrap="square"/>
+          <a:lstStyle/>
+          <a:p>
+            <a:pPr algn="ctr">
+              <a:defRPr sz="1400" b="1">
+                <a:solidFill>
+                  <a:srgbClr val="2563EB"/>
+                </a:solidFill>
+              </a:defRPr>
+            </a:pPr>
+            <a:r>
+              <a:t>The Two Fundamental Questions &amp; Distances</a:t>
+            </a:r>
+          </a:p>
+          <a:p>
+            <a:pPr>
+              <a:defRPr sz="1050">
+                <a:solidFill>
+                  <a:srgbClr val="94A3B8"/>
+                </a:solidFill>
+              </a:defRPr>
+            </a:pPr>
+            <a:r>
+              <a:t>Why naive nearest-neighbor fails on non-faces / strangers</a:t>
+            </a:r>
+          </a:p>
+          <a:p>
+            <a:pPr>
+              <a:defRPr sz="1050" b="1">
+                <a:solidFill>
+                  <a:srgbClr val="0F172A"/>
+                </a:solidFill>
+              </a:defRPr>
+            </a:pPr>
+            <a:r>
+              <a:t>• Question 1: 'Is this input a human face?':</a:t>
+            </a:r>
+          </a:p>
+          <a:p>
+            <a:pPr>
+              <a:defRPr sz="950">
+                <a:solidFill>
+                  <a:srgbClr val="1E293B"/>
+                </a:solidFill>
+              </a:defRPr>
+            </a:pPr>
+            <a:r>
+              <a:t>  Tested via Distance From Face Space (DFFS, ε_d):</a:t>
+            </a:r>
+            <a:br/>
+            <a:r>
+              <a:t>    ε_d = ||Γ - Γ̂||₂ (Reconstruction Residual)</a:t>
+            </a:r>
+            <a:br/>
+            <a:r>
+              <a:t>Because Eigenfaces are derived solely from human faces, they CANNOT accurately reconstruct arbitrary objects (e.g. coffee mug, dog, checkerboard). If ε_d ≥ θ_f: The system immediately rejects: REJECTED (NOT A FACE).</a:t>
+            </a:r>
+          </a:p>
+          <a:p>
+            <a:pPr>
+              <a:defRPr sz="1050" b="1">
+                <a:solidFill>
+                  <a:srgbClr val="0F172A"/>
+                </a:solidFill>
+              </a:defRPr>
+            </a:pPr>
+            <a:r>
+              <a:t>• Question 2: 'If it is a face, whose face is it?':</a:t>
+            </a:r>
+          </a:p>
+          <a:p>
+            <a:pPr>
+              <a:defRPr sz="950">
+                <a:solidFill>
+                  <a:srgbClr val="1E293B"/>
+                </a:solidFill>
+              </a:defRPr>
+            </a:pPr>
+            <a:r>
+              <a:t>  Tested via Distance In Face Space (DIFS, ε_c):</a:t>
+            </a:r>
+            <a:br/>
+            <a:r>
+              <a:t>    ε_c = min_k ||Ω - Ω_k||₂ (Subspace Euclidean Distance)</a:t>
+            </a:r>
+            <a:br/>
+            <a:r>
+              <a:t>We measure the distance between the probe's weight vector Ω and the enrolled class centroids Ω_k.</a:t>
+            </a:r>
+          </a:p>
+          <a:p>
+            <a:pPr>
+              <a:defRPr sz="1050" b="1">
+                <a:solidFill>
+                  <a:srgbClr val="0F172A"/>
+                </a:solidFill>
+              </a:defRPr>
+            </a:pPr>
+            <a:r>
+              <a:t>• Case 2: Known Enrolled Subject:</a:t>
+            </a:r>
+          </a:p>
+          <a:p>
+            <a:pPr>
+              <a:defRPr sz="950">
+                <a:solidFill>
+                  <a:srgbClr val="1E293B"/>
+                </a:solidFill>
+              </a:defRPr>
+            </a:pPr>
+            <a:r>
+              <a:t>  If ε_d &lt; θ_f AND ε_c &lt; θ_c:</a:t>
+            </a:r>
+            <a:br/>
+            <a:r>
+              <a:t>Matched to enrolled class with minimal distance → RECOGNIZED (KNOWN FACE).</a:t>
+            </a:r>
+          </a:p>
+          <a:p>
+            <a:pPr>
+              <a:defRPr sz="1050" b="1">
+                <a:solidFill>
+                  <a:srgbClr val="0F172A"/>
+                </a:solidFill>
+              </a:defRPr>
+            </a:pPr>
+            <a:r>
+              <a:t>• Case 3: Unseen Human Stranger (Open-Set):</a:t>
+            </a:r>
+          </a:p>
+          <a:p>
+            <a:pPr>
+              <a:defRPr sz="950">
+                <a:solidFill>
+                  <a:srgbClr val="1E293B"/>
+                </a:solidFill>
+              </a:defRPr>
+            </a:pPr>
+            <a:r>
+              <a:t>  If ε_d &lt; θ_f AND ε_c ≥ θ_c:</a:t>
+            </a:r>
+            <a:br/>
+            <a:r>
+              <a:t>Confirmed human face, but exceeds threshold for all known users → DETECTED (UNKNOWN VISITOR). Enables automated biometric enrollment.</a:t>
             </a:r>
           </a:p>
         </p:txBody>
       </p:sp>
       <p:pic>
         <p:nvPicPr>
-          <p:cNvPr id="7" name="Picture 6" descr="04_decision_space_geometry.png"/>
+          <p:cNvPr id="8" name="Picture 7" descr="04_decision_space_geometry.png"/>
           <p:cNvPicPr>
             <a:picLocks noChangeAspect="1"/>
           </p:cNvPicPr>
@@ -8780,218 +8986,14 @@
         </p:blipFill>
         <p:spPr>
           <a:xfrm>
-            <a:off x="731520" y="1371600"/>
-            <a:ext cx="5212080" cy="3748013"/>
+            <a:off x="6217920" y="1280160"/>
+            <a:ext cx="5212080" cy="5212080"/>
           </a:xfrm>
           <a:prstGeom prst="rect">
             <a:avLst/>
           </a:prstGeom>
         </p:spPr>
       </p:pic>
-      <p:sp>
-        <p:nvSpPr>
-          <p:cNvPr id="8" name="Rounded Rectangle 7"/>
-          <p:cNvSpPr/>
-          <p:nvPr/>
-        </p:nvSpPr>
-        <p:spPr>
-          <a:xfrm>
-            <a:off x="6217920" y="1371600"/>
-            <a:ext cx="5212080" cy="4937760"/>
-          </a:xfrm>
-          <a:prstGeom prst="roundRect">
-            <a:avLst/>
-          </a:prstGeom>
-          <a:solidFill>
-            <a:srgbClr val="FFFFFF"/>
-          </a:solidFill>
-          <a:ln w="12700">
-            <a:solidFill>
-              <a:srgbClr val="E2E8F0"/>
-            </a:solidFill>
-          </a:ln>
-        </p:spPr>
-        <p:style>
-          <a:lnRef idx="1">
-            <a:schemeClr val="accent1"/>
-          </a:lnRef>
-          <a:fillRef idx="3">
-            <a:schemeClr val="accent1"/>
-          </a:fillRef>
-          <a:effectRef idx="2">
-            <a:schemeClr val="accent1"/>
-          </a:effectRef>
-          <a:fontRef idx="minor">
-            <a:schemeClr val="lt1"/>
-          </a:fontRef>
-        </p:style>
-        <p:txBody>
-          <a:bodyPr rtlCol="0" anchor="ctr" wrap="square"/>
-          <a:lstStyle/>
-          <a:p>
-            <a:pPr algn="ctr">
-              <a:defRPr sz="1500" b="1">
-                <a:solidFill>
-                  <a:srgbClr val="2563EB"/>
-                </a:solidFill>
-              </a:defRPr>
-            </a:pPr>
-            <a:r>
-              <a:t>Dual-Threshold Metric Formulation</a:t>
-            </a:r>
-          </a:p>
-          <a:p>
-            <a:pPr>
-              <a:defRPr sz="1100">
-                <a:solidFill>
-                  <a:srgbClr val="1E293B"/>
-                </a:solidFill>
-              </a:defRPr>
-            </a:pPr>
-            <a:r>
-              <a:t>1. Distance From Face Space (DFFS) - ε_d:</a:t>
-            </a:r>
-          </a:p>
-          <a:p>
-            <a:pPr>
-              <a:defRPr sz="1100">
-                <a:solidFill>
-                  <a:srgbClr val="1E293B"/>
-                </a:solidFill>
-              </a:defRPr>
-            </a:pPr>
-            <a:r>
-              <a:t>   ε_d = ||Γ - Γ̂||₂ = ||(I - U Uᵀ)(Γ - Ψ)||₂</a:t>
-            </a:r>
-          </a:p>
-          <a:p>
-            <a:pPr>
-              <a:defRPr sz="1100">
-                <a:solidFill>
-                  <a:srgbClr val="1E293B"/>
-                </a:solidFill>
-              </a:defRPr>
-            </a:pPr>
-            <a:r>
-              <a:t>   Measures orthogonal residual. If ε_d ≥ θ_f, the pattern cannot be reconstructed by face basis.</a:t>
-            </a:r>
-          </a:p>
-          <a:p>
-            <a:pPr>
-              <a:defRPr sz="1100">
-                <a:solidFill>
-                  <a:srgbClr val="1E293B"/>
-                </a:solidFill>
-              </a:defRPr>
-            </a:pPr>
-          </a:p>
-          <a:p>
-            <a:pPr>
-              <a:defRPr sz="1100">
-                <a:solidFill>
-                  <a:srgbClr val="1E293B"/>
-                </a:solidFill>
-              </a:defRPr>
-            </a:pPr>
-            <a:r>
-              <a:t>2. Distance In Face Space (DIFS) - ε_c:</a:t>
-            </a:r>
-          </a:p>
-          <a:p>
-            <a:pPr>
-              <a:defRPr sz="1100">
-                <a:solidFill>
-                  <a:srgbClr val="1E293B"/>
-                </a:solidFill>
-              </a:defRPr>
-            </a:pPr>
-            <a:r>
-              <a:t>   ε_c = min_k ||Ω - Ω_k||₂</a:t>
-            </a:r>
-          </a:p>
-          <a:p>
-            <a:pPr>
-              <a:defRPr sz="1100">
-                <a:solidFill>
-                  <a:srgbClr val="1E293B"/>
-                </a:solidFill>
-              </a:defRPr>
-            </a:pPr>
-            <a:r>
-              <a:t>   Measures Euclidean distance to closest enrolled subject centroid.</a:t>
-            </a:r>
-          </a:p>
-          <a:p>
-            <a:pPr>
-              <a:defRPr sz="1100">
-                <a:solidFill>
-                  <a:srgbClr val="1E293B"/>
-                </a:solidFill>
-              </a:defRPr>
-            </a:pPr>
-          </a:p>
-          <a:p>
-            <a:pPr>
-              <a:defRPr sz="1100">
-                <a:solidFill>
-                  <a:srgbClr val="1E293B"/>
-                </a:solidFill>
-              </a:defRPr>
-            </a:pPr>
-            <a:r>
-              <a:t>4 Operating Decisions:</a:t>
-            </a:r>
-          </a:p>
-          <a:p>
-            <a:pPr>
-              <a:defRPr sz="1100">
-                <a:solidFill>
-                  <a:srgbClr val="1E293B"/>
-                </a:solidFill>
-              </a:defRPr>
-            </a:pPr>
-            <a:r>
-              <a:t>• CASE 1: NOT A FACE (ε_d ≥ θ_f) → Non-face rejection.</a:t>
-            </a:r>
-          </a:p>
-          <a:p>
-            <a:pPr>
-              <a:defRPr sz="1100">
-                <a:solidFill>
-                  <a:srgbClr val="1E293B"/>
-                </a:solidFill>
-              </a:defRPr>
-            </a:pPr>
-            <a:r>
-              <a:t>• CASE 2: KNOWN FACE (ε_d &lt; θ_f ∧ ε_c &lt; θ_c) → Recognized as subject c*.</a:t>
-            </a:r>
-          </a:p>
-          <a:p>
-            <a:pPr>
-              <a:defRPr sz="1100">
-                <a:solidFill>
-                  <a:srgbClr val="1E293B"/>
-                </a:solidFill>
-              </a:defRPr>
-            </a:pPr>
-            <a:r>
-              <a:t>• CASE 3: UNKNOWN FACE (ε_d &lt; θ_f ∧ ε_c ≥ θ_c) → Valid human face detected, candidate for enrollment.</a:t>
-            </a:r>
-          </a:p>
-          <a:p>
-            <a:pPr>
-              <a:defRPr sz="1100">
-                <a:solidFill>
-                  <a:srgbClr val="1E293B"/>
-                </a:solidFill>
-              </a:defRPr>
-            </a:pPr>
-            <a:r>
-              <a:t>• CASE 4: FALSE MATCH RISK (ε_d ≥ θ_f ∧ ε_c &lt; θ_c) → Rejected by face space residual.</a:t>
-            </a:r>
-          </a:p>
-        </p:txBody>
-      </p:sp>
     </p:spTree>
   </p:cSld>
   <p:clrMapOvr>
@@ -9204,45 +9206,21 @@
               </a:defRPr>
             </a:pPr>
             <a:r>
-              <a:t>8. Experimental Benchmark &amp; Performance Results</a:t>
-            </a:r>
-          </a:p>
-        </p:txBody>
-      </p:sp>
-      <p:pic>
-        <p:nvPicPr>
-          <p:cNvPr id="7" name="Picture 6" descr="06_accuracy_vs_k.png"/>
-          <p:cNvPicPr>
-            <a:picLocks noChangeAspect="1"/>
-          </p:cNvPicPr>
-          <p:nvPr/>
-        </p:nvPicPr>
-        <p:blipFill>
-          <a:blip r:embed="rId2"/>
-          <a:stretch>
-            <a:fillRect/>
-          </a:stretch>
-        </p:blipFill>
-        <p:spPr>
-          <a:xfrm>
-            <a:off x="731520" y="1371600"/>
-            <a:ext cx="5212080" cy="3100858"/>
-          </a:xfrm>
-          <a:prstGeom prst="rect">
-            <a:avLst/>
-          </a:prstGeom>
-        </p:spPr>
-      </p:pic>
-      <p:sp>
-        <p:nvSpPr>
-          <p:cNvPr id="8" name="Rounded Rectangle 7"/>
+              <a:t>Experimental Setup &amp; Open-Set Evaluation Protocol</a:t>
+            </a:r>
+          </a:p>
+        </p:txBody>
+      </p:sp>
+      <p:sp>
+        <p:nvSpPr>
+          <p:cNvPr id="7" name="Rounded Rectangle 6"/>
           <p:cNvSpPr/>
           <p:nvPr/>
         </p:nvSpPr>
         <p:spPr>
           <a:xfrm>
-            <a:off x="6217920" y="1371600"/>
-            <a:ext cx="5212080" cy="4937760"/>
+            <a:off x="731520" y="1371600"/>
+            <a:ext cx="3291840" cy="4937760"/>
           </a:xfrm>
           <a:prstGeom prst="roundRect">
             <a:avLst/>
@@ -9282,19 +9260,31 @@
               </a:defRPr>
             </a:pPr>
             <a:r>
-              <a:t>Empirical Results on Yale/AT&amp;T Dataset</a:t>
+              <a:t>The AT&amp;T / Olivetti Dataset</a:t>
             </a:r>
           </a:p>
           <a:p>
             <a:pPr>
               <a:defRPr sz="1100">
                 <a:solidFill>
+                  <a:srgbClr val="94A3B8"/>
+                </a:solidFill>
+              </a:defRPr>
+            </a:pPr>
+            <a:r>
+              <a:t>400 Normalized Facial Images</a:t>
+            </a:r>
+          </a:p>
+          <a:p>
+            <a:pPr>
+              <a:defRPr sz="1100">
+                <a:solidFill>
                   <a:srgbClr val="1E293B"/>
                 </a:solidFill>
               </a:defRPr>
             </a:pPr>
             <a:r>
-              <a:t>• Dataset Configuration:</a:t>
+              <a:t>• 40 distinct individuals (subjects s1 through s40).</a:t>
             </a:r>
           </a:p>
           <a:p>
@@ -9306,7 +9296,7 @@
               </a:defRPr>
             </a:pPr>
             <a:r>
-              <a:t>  - 15 subjects, 11 variations each = 165 total face images.</a:t>
+              <a:t>• 10 images per subject under controlled conditions.</a:t>
             </a:r>
           </a:p>
           <a:p>
@@ -9318,7 +9308,7 @@
               </a:defRPr>
             </a:pPr>
             <a:r>
-              <a:t>  - Preprocessed &amp; aligned to 64 × 64 pixels (D = 4096).</a:t>
+              <a:t>• Variations: Minor tilt, lighting changes, facial expressions (open/closed eyes, smiling), eyeglasses.</a:t>
             </a:r>
           </a:p>
           <a:p>
@@ -9329,17 +9319,86 @@
                 </a:solidFill>
               </a:defRPr>
             </a:pPr>
+            <a:r>
+              <a:t>• Normalized dimensions: 64 × 64 pixels (grayscale).</a:t>
+            </a:r>
+          </a:p>
+        </p:txBody>
+      </p:sp>
+      <p:sp>
+        <p:nvSpPr>
+          <p:cNvPr id="8" name="Rounded Rectangle 7"/>
+          <p:cNvSpPr/>
+          <p:nvPr/>
+        </p:nvSpPr>
+        <p:spPr>
+          <a:xfrm>
+            <a:off x="4389120" y="1371600"/>
+            <a:ext cx="3291840" cy="4937760"/>
+          </a:xfrm>
+          <a:prstGeom prst="roundRect">
+            <a:avLst/>
+          </a:prstGeom>
+          <a:solidFill>
+            <a:srgbClr val="FFFFFF"/>
+          </a:solidFill>
+          <a:ln w="12700">
+            <a:solidFill>
+              <a:srgbClr val="E2E8F0"/>
+            </a:solidFill>
+          </a:ln>
+        </p:spPr>
+        <p:style>
+          <a:lnRef idx="1">
+            <a:schemeClr val="accent1"/>
+          </a:lnRef>
+          <a:fillRef idx="3">
+            <a:schemeClr val="accent1"/>
+          </a:fillRef>
+          <a:effectRef idx="2">
+            <a:schemeClr val="accent1"/>
+          </a:effectRef>
+          <a:fontRef idx="minor">
+            <a:schemeClr val="lt1"/>
+          </a:fontRef>
+        </p:style>
+        <p:txBody>
+          <a:bodyPr rtlCol="0" anchor="ctr" wrap="square"/>
+          <a:lstStyle/>
+          <a:p>
+            <a:pPr algn="ctr">
+              <a:defRPr sz="1500" b="1">
+                <a:solidFill>
+                  <a:srgbClr val="F59E0B"/>
+                </a:solidFill>
+              </a:defRPr>
+            </a:pPr>
+            <a:r>
+              <a:t>Open-Set Subspace Partition</a:t>
+            </a:r>
           </a:p>
           <a:p>
             <a:pPr>
               <a:defRPr sz="1100">
                 <a:solidFill>
+                  <a:srgbClr val="94A3B8"/>
+                </a:solidFill>
+              </a:defRPr>
+            </a:pPr>
+            <a:r>
+              <a:t>Gallery, Known Probes &amp; Unseen Subjects</a:t>
+            </a:r>
+          </a:p>
+          <a:p>
+            <a:pPr>
+              <a:defRPr sz="1100">
+                <a:solidFill>
                   <a:srgbClr val="1E293B"/>
                 </a:solidFill>
               </a:defRPr>
             </a:pPr>
             <a:r>
-              <a:t>• Recognition Accuracy vs Components (K):</a:t>
+              <a:t>• Enrolled Subjects (35 individuals):</a:t>
             </a:r>
           </a:p>
           <a:p>
@@ -9351,7 +9410,7 @@
               </a:defRPr>
             </a:pPr>
             <a:r>
-              <a:t>  - K = 5:  58.2% (captures only coarse lighting)</a:t>
+              <a:t>    - 7 images/subject for training (M = 245 gallery faces).</a:t>
             </a:r>
           </a:p>
           <a:p>
@@ -9363,7 +9422,7 @@
               </a:defRPr>
             </a:pPr>
             <a:r>
-              <a:t>  - K = 15: 78.4% (captures basic facial structure)</a:t>
+              <a:t>    - 3 images/subject for testing (105 known probes).</a:t>
             </a:r>
           </a:p>
           <a:p>
@@ -9374,9 +9433,6 @@
                 </a:solidFill>
               </a:defRPr>
             </a:pPr>
-            <a:r>
-              <a:t>  - K = 30: 86.8% (sufficient for reliable recognition)</a:t>
-            </a:r>
           </a:p>
           <a:p>
             <a:pPr>
@@ -9387,7 +9443,7 @@
               </a:defRPr>
             </a:pPr>
             <a:r>
-              <a:t>  - K = 40: 89.2% (optimal accuracy vs efficiency tradeoff)</a:t>
+              <a:t>• Unseen / Open-Set Subjects (5 individuals):</a:t>
             </a:r>
           </a:p>
           <a:p>
@@ -9399,7 +9455,7 @@
               </a:defRPr>
             </a:pPr>
             <a:r>
-              <a:t>  - K = 50: 90.1% (plateau; extra components encode noise)</a:t>
+              <a:t>    - Completely held out from training (50 unknown faces).</a:t>
             </a:r>
           </a:p>
           <a:p>
@@ -9410,17 +9466,86 @@
                 </a:solidFill>
               </a:defRPr>
             </a:pPr>
+            <a:r>
+              <a:t>    - Tests false acceptance vs valid stranger enrollment.</a:t>
+            </a:r>
+          </a:p>
+        </p:txBody>
+      </p:sp>
+      <p:sp>
+        <p:nvSpPr>
+          <p:cNvPr id="9" name="Rounded Rectangle 8"/>
+          <p:cNvSpPr/>
+          <p:nvPr/>
+        </p:nvSpPr>
+        <p:spPr>
+          <a:xfrm>
+            <a:off x="8046720" y="1371600"/>
+            <a:ext cx="3383280" cy="4937760"/>
+          </a:xfrm>
+          <a:prstGeom prst="roundRect">
+            <a:avLst/>
+          </a:prstGeom>
+          <a:solidFill>
+            <a:srgbClr val="FFFFFF"/>
+          </a:solidFill>
+          <a:ln w="12700">
+            <a:solidFill>
+              <a:srgbClr val="E2E8F0"/>
+            </a:solidFill>
+          </a:ln>
+        </p:spPr>
+        <p:style>
+          <a:lnRef idx="1">
+            <a:schemeClr val="accent1"/>
+          </a:lnRef>
+          <a:fillRef idx="3">
+            <a:schemeClr val="accent1"/>
+          </a:fillRef>
+          <a:effectRef idx="2">
+            <a:schemeClr val="accent1"/>
+          </a:effectRef>
+          <a:fontRef idx="minor">
+            <a:schemeClr val="lt1"/>
+          </a:fontRef>
+        </p:style>
+        <p:txBody>
+          <a:bodyPr rtlCol="0" anchor="ctr" wrap="square"/>
+          <a:lstStyle/>
+          <a:p>
+            <a:pPr algn="ctr">
+              <a:defRPr sz="1500" b="1">
+                <a:solidFill>
+                  <a:srgbClr val="E11D48"/>
+                </a:solidFill>
+              </a:defRPr>
+            </a:pPr>
+            <a:r>
+              <a:t>Synthetic Non-Face Benchmark</a:t>
+            </a:r>
           </a:p>
           <a:p>
             <a:pPr>
               <a:defRPr sz="1100">
                 <a:solidFill>
+                  <a:srgbClr val="94A3B8"/>
+                </a:solidFill>
+              </a:defRPr>
+            </a:pPr>
+            <a:r>
+              <a:t>Testing False Positive Rejection</a:t>
+            </a:r>
+          </a:p>
+          <a:p>
+            <a:pPr>
+              <a:defRPr sz="1100">
+                <a:solidFill>
                   <a:srgbClr val="1E293B"/>
                 </a:solidFill>
               </a:defRPr>
             </a:pPr>
             <a:r>
-              <a:t>• Dimensionality Reduction Factor:</a:t>
+              <a:t>• 20 synthetic non-face test images generated:</a:t>
             </a:r>
           </a:p>
           <a:p>
@@ -9432,7 +9557,7 @@
               </a:defRPr>
             </a:pPr>
             <a:r>
-              <a:t>  - 4096 dimensions → 40 components = 99.02% compression!</a:t>
+              <a:t>    - Regular checkerboards of varying frequencies.</a:t>
             </a:r>
           </a:p>
           <a:p>
@@ -9444,7 +9569,7 @@
               </a:defRPr>
             </a:pPr>
             <a:r>
-              <a:t>• Non-Face Rejection Rate: &gt;88% on geometric &amp; noise probes.</a:t>
+              <a:t>    - High-frequency Gaussian white noise.</a:t>
             </a:r>
           </a:p>
           <a:p>
@@ -9456,7 +9581,28 @@
               </a:defRPr>
             </a:pPr>
             <a:r>
-              <a:t>• Inference Speed: &lt; 2.5 milliseconds per probe.</a:t>
+              <a:t>    - Uniform black / white / gradient fields.</a:t>
+            </a:r>
+          </a:p>
+          <a:p>
+            <a:pPr>
+              <a:defRPr sz="1100">
+                <a:solidFill>
+                  <a:srgbClr val="1E293B"/>
+                </a:solidFill>
+              </a:defRPr>
+            </a:pPr>
+          </a:p>
+          <a:p>
+            <a:pPr>
+              <a:defRPr sz="1100">
+                <a:solidFill>
+                  <a:srgbClr val="1E293B"/>
+                </a:solidFill>
+              </a:defRPr>
+            </a:pPr>
+            <a:r>
+              <a:t>• Purpose: Verifies whether DFFS threshold (θ_f) properly rejects non-face objects rather than assigning a random identity.</a:t>
             </a:r>
           </a:p>
         </p:txBody>
